--- a/Web/UminekoWeb_中澤拓也/発表資料_中澤拓也.pptx
+++ b/Web/UminekoWeb_中澤拓也/発表資料_中澤拓也.pptx
@@ -5,7 +5,7 @@
     <p:sldMasterId id="2147483648" r:id="rId1"/>
   </p:sldMasterIdLst>
   <p:notesMasterIdLst>
-    <p:notesMasterId r:id="rId11"/>
+    <p:notesMasterId r:id="rId13"/>
   </p:notesMasterIdLst>
   <p:sldIdLst>
     <p:sldId id="256" r:id="rId2"/>
@@ -16,7 +16,9 @@
     <p:sldId id="267" r:id="rId7"/>
     <p:sldId id="268" r:id="rId8"/>
     <p:sldId id="269" r:id="rId9"/>
-    <p:sldId id="262" r:id="rId10"/>
+    <p:sldId id="270" r:id="rId10"/>
+    <p:sldId id="271" r:id="rId11"/>
+    <p:sldId id="274" r:id="rId12"/>
   </p:sldIdLst>
   <p:sldSz cx="12192000" cy="6858000"/>
   <p:notesSz cx="6858000" cy="9144000"/>
@@ -205,7 +207,7 @@
           <a:p>
             <a:fld id="{D9A8B03D-EC97-49AC-B16A-822760B2A63D}" type="datetimeFigureOut">
               <a:rPr kumimoji="1" lang="ja-JP" altLang="en-US" smtClean="0"/>
-              <a:t>2026/5/28</a:t>
+              <a:t>2026/5/29</a:t>
             </a:fld>
             <a:endParaRPr kumimoji="1" lang="ja-JP" altLang="en-US"/>
           </a:p>
@@ -504,6 +506,1239 @@
 </p:notesMaster>
 </file>
 
+<file path=ppt/notesSlides/notesSlide1.xml><?xml version="1.0" encoding="utf-8"?>
+<p:notes xmlns:a="http://schemas.openxmlformats.org/drawingml/2006/main" xmlns:r="http://schemas.openxmlformats.org/officeDocument/2006/relationships" xmlns:p="http://schemas.openxmlformats.org/presentationml/2006/main">
+  <p:cSld>
+    <p:spTree>
+      <p:nvGrpSpPr>
+        <p:cNvPr id="1" name=""/>
+        <p:cNvGrpSpPr/>
+        <p:nvPr/>
+      </p:nvGrpSpPr>
+      <p:grpSpPr>
+        <a:xfrm>
+          <a:off x="0" y="0"/>
+          <a:ext cx="0" cy="0"/>
+          <a:chOff x="0" y="0"/>
+          <a:chExt cx="0" cy="0"/>
+        </a:xfrm>
+      </p:grpSpPr>
+      <p:sp>
+        <p:nvSpPr>
+          <p:cNvPr id="2" name="スライド イメージ プレースホルダー 1"/>
+          <p:cNvSpPr>
+            <a:spLocks noGrp="1" noRot="1" noChangeAspect="1"/>
+          </p:cNvSpPr>
+          <p:nvPr>
+            <p:ph type="sldImg"/>
+          </p:nvPr>
+        </p:nvSpPr>
+        <p:spPr/>
+      </p:sp>
+      <p:sp>
+        <p:nvSpPr>
+          <p:cNvPr id="3" name="ノート プレースホルダー 2"/>
+          <p:cNvSpPr>
+            <a:spLocks noGrp="1"/>
+          </p:cNvSpPr>
+          <p:nvPr>
+            <p:ph type="body" idx="1"/>
+          </p:nvPr>
+        </p:nvSpPr>
+        <p:spPr/>
+        <p:txBody>
+          <a:bodyPr/>
+          <a:lstStyle/>
+          <a:p>
+            <a:r>
+              <a:rPr kumimoji="1" lang="ja-JP" altLang="en-US" dirty="0"/>
+              <a:t>株式会社マプコンの中澤拓也です。</a:t>
+            </a:r>
+            <a:endParaRPr kumimoji="1" lang="en-US" altLang="ja-JP" dirty="0"/>
+          </a:p>
+          <a:p>
+            <a:r>
+              <a:rPr kumimoji="1" lang="ja-JP" altLang="en-US" dirty="0"/>
+              <a:t>総合演習の発表をさせていただきます。</a:t>
+            </a:r>
+            <a:endParaRPr kumimoji="1" lang="en-US" altLang="ja-JP" dirty="0"/>
+          </a:p>
+          <a:p>
+            <a:r>
+              <a:rPr kumimoji="1" lang="ja-JP" altLang="en-US" dirty="0"/>
+              <a:t>発表と質疑応答でおよそ</a:t>
+            </a:r>
+            <a:r>
+              <a:rPr kumimoji="1" lang="en-US" altLang="ja-JP" dirty="0"/>
+              <a:t>12</a:t>
+            </a:r>
+            <a:r>
+              <a:rPr kumimoji="1" lang="ja-JP" altLang="en-US" dirty="0"/>
+              <a:t>分前後を予定しております。</a:t>
+            </a:r>
+            <a:endParaRPr kumimoji="1" lang="en-US" altLang="ja-JP" dirty="0"/>
+          </a:p>
+          <a:p>
+            <a:r>
+              <a:rPr kumimoji="1" lang="ja-JP" altLang="en-US" dirty="0"/>
+              <a:t>よろしくお願いいたします。</a:t>
+            </a:r>
+          </a:p>
+        </p:txBody>
+      </p:sp>
+      <p:sp>
+        <p:nvSpPr>
+          <p:cNvPr id="4" name="スライド番号プレースホルダー 3"/>
+          <p:cNvSpPr>
+            <a:spLocks noGrp="1"/>
+          </p:cNvSpPr>
+          <p:nvPr>
+            <p:ph type="sldNum" sz="quarter" idx="5"/>
+          </p:nvPr>
+        </p:nvSpPr>
+        <p:spPr/>
+        <p:txBody>
+          <a:bodyPr/>
+          <a:lstStyle/>
+          <a:p>
+            <a:fld id="{BD97B567-DCFF-45C4-B2F4-05D37AC39A4E}" type="slidenum">
+              <a:rPr kumimoji="1" lang="ja-JP" altLang="en-US" smtClean="0"/>
+              <a:t>1</a:t>
+            </a:fld>
+            <a:endParaRPr kumimoji="1" lang="ja-JP" altLang="en-US"/>
+          </a:p>
+        </p:txBody>
+      </p:sp>
+    </p:spTree>
+    <p:extLst>
+      <p:ext uri="{BB962C8B-B14F-4D97-AF65-F5344CB8AC3E}">
+        <p14:creationId xmlns:p14="http://schemas.microsoft.com/office/powerpoint/2010/main" val="3395208044"/>
+      </p:ext>
+    </p:extLst>
+  </p:cSld>
+  <p:clrMapOvr>
+    <a:masterClrMapping/>
+  </p:clrMapOvr>
+</p:notes>
+</file>
+
+<file path=ppt/notesSlides/notesSlide10.xml><?xml version="1.0" encoding="utf-8"?>
+<p:notes xmlns:a="http://schemas.openxmlformats.org/drawingml/2006/main" xmlns:r="http://schemas.openxmlformats.org/officeDocument/2006/relationships" xmlns:p="http://schemas.openxmlformats.org/presentationml/2006/main">
+  <p:cSld>
+    <p:spTree>
+      <p:nvGrpSpPr>
+        <p:cNvPr id="1" name=""/>
+        <p:cNvGrpSpPr/>
+        <p:nvPr/>
+      </p:nvGrpSpPr>
+      <p:grpSpPr>
+        <a:xfrm>
+          <a:off x="0" y="0"/>
+          <a:ext cx="0" cy="0"/>
+          <a:chOff x="0" y="0"/>
+          <a:chExt cx="0" cy="0"/>
+        </a:xfrm>
+      </p:grpSpPr>
+      <p:sp>
+        <p:nvSpPr>
+          <p:cNvPr id="2" name="スライド イメージ プレースホルダー 1"/>
+          <p:cNvSpPr>
+            <a:spLocks noGrp="1" noRot="1" noChangeAspect="1"/>
+          </p:cNvSpPr>
+          <p:nvPr>
+            <p:ph type="sldImg"/>
+          </p:nvPr>
+        </p:nvSpPr>
+        <p:spPr/>
+      </p:sp>
+      <p:sp>
+        <p:nvSpPr>
+          <p:cNvPr id="3" name="ノート プレースホルダー 2"/>
+          <p:cNvSpPr>
+            <a:spLocks noGrp="1"/>
+          </p:cNvSpPr>
+          <p:nvPr>
+            <p:ph type="body" idx="1"/>
+          </p:nvPr>
+        </p:nvSpPr>
+        <p:spPr/>
+        <p:txBody>
+          <a:bodyPr/>
+          <a:lstStyle/>
+          <a:p>
+            <a:r>
+              <a:rPr kumimoji="1" lang="ja-JP" altLang="en-US" dirty="0"/>
+              <a:t>まとめは読み上げるだけ</a:t>
+            </a:r>
+          </a:p>
+        </p:txBody>
+      </p:sp>
+      <p:sp>
+        <p:nvSpPr>
+          <p:cNvPr id="4" name="スライド番号プレースホルダー 3"/>
+          <p:cNvSpPr>
+            <a:spLocks noGrp="1"/>
+          </p:cNvSpPr>
+          <p:nvPr>
+            <p:ph type="sldNum" sz="quarter" idx="5"/>
+          </p:nvPr>
+        </p:nvSpPr>
+        <p:spPr/>
+        <p:txBody>
+          <a:bodyPr/>
+          <a:lstStyle/>
+          <a:p>
+            <a:fld id="{BD97B567-DCFF-45C4-B2F4-05D37AC39A4E}" type="slidenum">
+              <a:rPr kumimoji="1" lang="ja-JP" altLang="en-US" smtClean="0"/>
+              <a:t>10</a:t>
+            </a:fld>
+            <a:endParaRPr kumimoji="1" lang="ja-JP" altLang="en-US"/>
+          </a:p>
+        </p:txBody>
+      </p:sp>
+    </p:spTree>
+    <p:extLst>
+      <p:ext uri="{BB962C8B-B14F-4D97-AF65-F5344CB8AC3E}">
+        <p14:creationId xmlns:p14="http://schemas.microsoft.com/office/powerpoint/2010/main" val="1267870719"/>
+      </p:ext>
+    </p:extLst>
+  </p:cSld>
+  <p:clrMapOvr>
+    <a:masterClrMapping/>
+  </p:clrMapOvr>
+</p:notes>
+</file>
+
+<file path=ppt/notesSlides/notesSlide11.xml><?xml version="1.0" encoding="utf-8"?>
+<p:notes xmlns:a="http://schemas.openxmlformats.org/drawingml/2006/main" xmlns:r="http://schemas.openxmlformats.org/officeDocument/2006/relationships" xmlns:p="http://schemas.openxmlformats.org/presentationml/2006/main">
+  <p:cSld>
+    <p:spTree>
+      <p:nvGrpSpPr>
+        <p:cNvPr id="1" name=""/>
+        <p:cNvGrpSpPr/>
+        <p:nvPr/>
+      </p:nvGrpSpPr>
+      <p:grpSpPr>
+        <a:xfrm>
+          <a:off x="0" y="0"/>
+          <a:ext cx="0" cy="0"/>
+          <a:chOff x="0" y="0"/>
+          <a:chExt cx="0" cy="0"/>
+        </a:xfrm>
+      </p:grpSpPr>
+      <p:sp>
+        <p:nvSpPr>
+          <p:cNvPr id="2" name="スライド イメージ プレースホルダー 1"/>
+          <p:cNvSpPr>
+            <a:spLocks noGrp="1" noRot="1" noChangeAspect="1"/>
+          </p:cNvSpPr>
+          <p:nvPr>
+            <p:ph type="sldImg"/>
+          </p:nvPr>
+        </p:nvSpPr>
+        <p:spPr/>
+      </p:sp>
+      <p:sp>
+        <p:nvSpPr>
+          <p:cNvPr id="3" name="ノート プレースホルダー 2"/>
+          <p:cNvSpPr>
+            <a:spLocks noGrp="1"/>
+          </p:cNvSpPr>
+          <p:nvPr>
+            <p:ph type="body" idx="1"/>
+          </p:nvPr>
+        </p:nvSpPr>
+        <p:spPr/>
+        <p:txBody>
+          <a:bodyPr/>
+          <a:lstStyle/>
+          <a:p>
+            <a:r>
+              <a:rPr kumimoji="1" lang="ja-JP" altLang="en-US" dirty="0"/>
+              <a:t>以上で発表を終了させていただきます。</a:t>
+            </a:r>
+            <a:endParaRPr kumimoji="1" lang="en-US" altLang="ja-JP" dirty="0"/>
+          </a:p>
+          <a:p>
+            <a:r>
+              <a:rPr kumimoji="1" lang="ja-JP" altLang="en-US" dirty="0"/>
+              <a:t>ご清聴ありがとうございました。</a:t>
+            </a:r>
+            <a:endParaRPr kumimoji="1" lang="en-US" altLang="ja-JP" dirty="0"/>
+          </a:p>
+          <a:p>
+            <a:r>
+              <a:rPr kumimoji="1" lang="ja-JP" altLang="en-US" dirty="0"/>
+              <a:t>続いて質疑応答に入らさせていただきます。なにか質問等ございましたらお願いいたします。</a:t>
+            </a:r>
+          </a:p>
+        </p:txBody>
+      </p:sp>
+      <p:sp>
+        <p:nvSpPr>
+          <p:cNvPr id="4" name="スライド番号プレースホルダー 3"/>
+          <p:cNvSpPr>
+            <a:spLocks noGrp="1"/>
+          </p:cNvSpPr>
+          <p:nvPr>
+            <p:ph type="sldNum" sz="quarter" idx="5"/>
+          </p:nvPr>
+        </p:nvSpPr>
+        <p:spPr/>
+        <p:txBody>
+          <a:bodyPr/>
+          <a:lstStyle/>
+          <a:p>
+            <a:fld id="{BD97B567-DCFF-45C4-B2F4-05D37AC39A4E}" type="slidenum">
+              <a:rPr kumimoji="1" lang="ja-JP" altLang="en-US" smtClean="0"/>
+              <a:t>11</a:t>
+            </a:fld>
+            <a:endParaRPr kumimoji="1" lang="ja-JP" altLang="en-US"/>
+          </a:p>
+        </p:txBody>
+      </p:sp>
+    </p:spTree>
+    <p:extLst>
+      <p:ext uri="{BB962C8B-B14F-4D97-AF65-F5344CB8AC3E}">
+        <p14:creationId xmlns:p14="http://schemas.microsoft.com/office/powerpoint/2010/main" val="3480187770"/>
+      </p:ext>
+    </p:extLst>
+  </p:cSld>
+  <p:clrMapOvr>
+    <a:masterClrMapping/>
+  </p:clrMapOvr>
+</p:notes>
+</file>
+
+<file path=ppt/notesSlides/notesSlide2.xml><?xml version="1.0" encoding="utf-8"?>
+<p:notes xmlns:a="http://schemas.openxmlformats.org/drawingml/2006/main" xmlns:r="http://schemas.openxmlformats.org/officeDocument/2006/relationships" xmlns:p="http://schemas.openxmlformats.org/presentationml/2006/main">
+  <p:cSld>
+    <p:spTree>
+      <p:nvGrpSpPr>
+        <p:cNvPr id="1" name=""/>
+        <p:cNvGrpSpPr/>
+        <p:nvPr/>
+      </p:nvGrpSpPr>
+      <p:grpSpPr>
+        <a:xfrm>
+          <a:off x="0" y="0"/>
+          <a:ext cx="0" cy="0"/>
+          <a:chOff x="0" y="0"/>
+          <a:chExt cx="0" cy="0"/>
+        </a:xfrm>
+      </p:grpSpPr>
+      <p:sp>
+        <p:nvSpPr>
+          <p:cNvPr id="2" name="スライド イメージ プレースホルダー 1"/>
+          <p:cNvSpPr>
+            <a:spLocks noGrp="1" noRot="1" noChangeAspect="1"/>
+          </p:cNvSpPr>
+          <p:nvPr>
+            <p:ph type="sldImg"/>
+          </p:nvPr>
+        </p:nvSpPr>
+        <p:spPr/>
+      </p:sp>
+      <p:sp>
+        <p:nvSpPr>
+          <p:cNvPr id="3" name="ノート プレースホルダー 2"/>
+          <p:cNvSpPr>
+            <a:spLocks noGrp="1"/>
+          </p:cNvSpPr>
+          <p:nvPr>
+            <p:ph type="body" idx="1"/>
+          </p:nvPr>
+        </p:nvSpPr>
+        <p:spPr/>
+        <p:txBody>
+          <a:bodyPr/>
+          <a:lstStyle/>
+          <a:p>
+            <a:r>
+              <a:rPr kumimoji="1" lang="ja-JP" altLang="en-US" dirty="0"/>
+              <a:t>まず発表全体の流れを説明させていただきます。</a:t>
+            </a:r>
+            <a:endParaRPr kumimoji="1" lang="en-US" altLang="ja-JP" dirty="0"/>
+          </a:p>
+          <a:p>
+            <a:r>
+              <a:rPr kumimoji="1" lang="ja-JP" altLang="en-US" dirty="0"/>
+              <a:t>システム概要や構成と目的をお話しさせていただいた後、実際動いている画面をお見せいたします。</a:t>
+            </a:r>
+            <a:endParaRPr kumimoji="1" lang="en-US" altLang="ja-JP" dirty="0"/>
+          </a:p>
+          <a:p>
+            <a:r>
+              <a:rPr kumimoji="1" lang="ja-JP" altLang="en-US" dirty="0"/>
+              <a:t>その後まとめとして総合演習や研修全体の所感についてお話しさせていただきます。</a:t>
+            </a:r>
+            <a:endParaRPr kumimoji="1" lang="en-US" altLang="ja-JP" dirty="0"/>
+          </a:p>
+          <a:p>
+            <a:r>
+              <a:rPr kumimoji="1" lang="ja-JP" altLang="en-US" dirty="0"/>
+              <a:t>発表が終わり次第質疑応答に入らさせていただきます。</a:t>
+            </a:r>
+          </a:p>
+        </p:txBody>
+      </p:sp>
+      <p:sp>
+        <p:nvSpPr>
+          <p:cNvPr id="4" name="スライド番号プレースホルダー 3"/>
+          <p:cNvSpPr>
+            <a:spLocks noGrp="1"/>
+          </p:cNvSpPr>
+          <p:nvPr>
+            <p:ph type="sldNum" sz="quarter" idx="5"/>
+          </p:nvPr>
+        </p:nvSpPr>
+        <p:spPr/>
+        <p:txBody>
+          <a:bodyPr/>
+          <a:lstStyle/>
+          <a:p>
+            <a:fld id="{BD97B567-DCFF-45C4-B2F4-05D37AC39A4E}" type="slidenum">
+              <a:rPr kumimoji="1" lang="ja-JP" altLang="en-US" smtClean="0"/>
+              <a:t>2</a:t>
+            </a:fld>
+            <a:endParaRPr kumimoji="1" lang="ja-JP" altLang="en-US"/>
+          </a:p>
+        </p:txBody>
+      </p:sp>
+    </p:spTree>
+    <p:extLst>
+      <p:ext uri="{BB962C8B-B14F-4D97-AF65-F5344CB8AC3E}">
+        <p14:creationId xmlns:p14="http://schemas.microsoft.com/office/powerpoint/2010/main" val="2042154947"/>
+      </p:ext>
+    </p:extLst>
+  </p:cSld>
+  <p:clrMapOvr>
+    <a:masterClrMapping/>
+  </p:clrMapOvr>
+</p:notes>
+</file>
+
+<file path=ppt/notesSlides/notesSlide3.xml><?xml version="1.0" encoding="utf-8"?>
+<p:notes xmlns:a="http://schemas.openxmlformats.org/drawingml/2006/main" xmlns:r="http://schemas.openxmlformats.org/officeDocument/2006/relationships" xmlns:p="http://schemas.openxmlformats.org/presentationml/2006/main">
+  <p:cSld>
+    <p:spTree>
+      <p:nvGrpSpPr>
+        <p:cNvPr id="1" name=""/>
+        <p:cNvGrpSpPr/>
+        <p:nvPr/>
+      </p:nvGrpSpPr>
+      <p:grpSpPr>
+        <a:xfrm>
+          <a:off x="0" y="0"/>
+          <a:ext cx="0" cy="0"/>
+          <a:chOff x="0" y="0"/>
+          <a:chExt cx="0" cy="0"/>
+        </a:xfrm>
+      </p:grpSpPr>
+      <p:sp>
+        <p:nvSpPr>
+          <p:cNvPr id="2" name="スライド イメージ プレースホルダー 1"/>
+          <p:cNvSpPr>
+            <a:spLocks noGrp="1" noRot="1" noChangeAspect="1"/>
+          </p:cNvSpPr>
+          <p:nvPr>
+            <p:ph type="sldImg"/>
+          </p:nvPr>
+        </p:nvSpPr>
+        <p:spPr/>
+      </p:sp>
+      <p:sp>
+        <p:nvSpPr>
+          <p:cNvPr id="3" name="ノート プレースホルダー 2"/>
+          <p:cNvSpPr>
+            <a:spLocks noGrp="1"/>
+          </p:cNvSpPr>
+          <p:nvPr>
+            <p:ph type="body" idx="1"/>
+          </p:nvPr>
+        </p:nvSpPr>
+        <p:spPr/>
+        <p:txBody>
+          <a:bodyPr/>
+          <a:lstStyle/>
+          <a:p>
+            <a:r>
+              <a:rPr kumimoji="1" lang="ja-JP" altLang="en-US" dirty="0"/>
+              <a:t>システム概要と主要機能を読み上げる</a:t>
+            </a:r>
+          </a:p>
+        </p:txBody>
+      </p:sp>
+      <p:sp>
+        <p:nvSpPr>
+          <p:cNvPr id="4" name="スライド番号プレースホルダー 3"/>
+          <p:cNvSpPr>
+            <a:spLocks noGrp="1"/>
+          </p:cNvSpPr>
+          <p:nvPr>
+            <p:ph type="sldNum" sz="quarter" idx="5"/>
+          </p:nvPr>
+        </p:nvSpPr>
+        <p:spPr/>
+        <p:txBody>
+          <a:bodyPr/>
+          <a:lstStyle/>
+          <a:p>
+            <a:fld id="{BD97B567-DCFF-45C4-B2F4-05D37AC39A4E}" type="slidenum">
+              <a:rPr kumimoji="1" lang="ja-JP" altLang="en-US" smtClean="0"/>
+              <a:t>3</a:t>
+            </a:fld>
+            <a:endParaRPr kumimoji="1" lang="ja-JP" altLang="en-US"/>
+          </a:p>
+        </p:txBody>
+      </p:sp>
+    </p:spTree>
+    <p:extLst>
+      <p:ext uri="{BB962C8B-B14F-4D97-AF65-F5344CB8AC3E}">
+        <p14:creationId xmlns:p14="http://schemas.microsoft.com/office/powerpoint/2010/main" val="3994421115"/>
+      </p:ext>
+    </p:extLst>
+  </p:cSld>
+  <p:clrMapOvr>
+    <a:masterClrMapping/>
+  </p:clrMapOvr>
+</p:notes>
+</file>
+
+<file path=ppt/notesSlides/notesSlide4.xml><?xml version="1.0" encoding="utf-8"?>
+<p:notes xmlns:a="http://schemas.openxmlformats.org/drawingml/2006/main" xmlns:r="http://schemas.openxmlformats.org/officeDocument/2006/relationships" xmlns:p="http://schemas.openxmlformats.org/presentationml/2006/main">
+  <p:cSld>
+    <p:spTree>
+      <p:nvGrpSpPr>
+        <p:cNvPr id="1" name=""/>
+        <p:cNvGrpSpPr/>
+        <p:nvPr/>
+      </p:nvGrpSpPr>
+      <p:grpSpPr>
+        <a:xfrm>
+          <a:off x="0" y="0"/>
+          <a:ext cx="0" cy="0"/>
+          <a:chOff x="0" y="0"/>
+          <a:chExt cx="0" cy="0"/>
+        </a:xfrm>
+      </p:grpSpPr>
+      <p:sp>
+        <p:nvSpPr>
+          <p:cNvPr id="2" name="スライド イメージ プレースホルダー 1"/>
+          <p:cNvSpPr>
+            <a:spLocks noGrp="1" noRot="1" noChangeAspect="1"/>
+          </p:cNvSpPr>
+          <p:nvPr>
+            <p:ph type="sldImg"/>
+          </p:nvPr>
+        </p:nvSpPr>
+        <p:spPr/>
+      </p:sp>
+      <p:sp>
+        <p:nvSpPr>
+          <p:cNvPr id="3" name="ノート プレースホルダー 2"/>
+          <p:cNvSpPr>
+            <a:spLocks noGrp="1"/>
+          </p:cNvSpPr>
+          <p:nvPr>
+            <p:ph type="body" idx="1"/>
+          </p:nvPr>
+        </p:nvSpPr>
+        <p:spPr/>
+        <p:txBody>
+          <a:bodyPr/>
+          <a:lstStyle/>
+          <a:p>
+            <a:r>
+              <a:rPr kumimoji="1" lang="ja-JP" altLang="en-US" dirty="0"/>
+              <a:t>開発目的を業務面と学習面から説明</a:t>
+            </a:r>
+          </a:p>
+        </p:txBody>
+      </p:sp>
+      <p:sp>
+        <p:nvSpPr>
+          <p:cNvPr id="4" name="スライド番号プレースホルダー 3"/>
+          <p:cNvSpPr>
+            <a:spLocks noGrp="1"/>
+          </p:cNvSpPr>
+          <p:nvPr>
+            <p:ph type="sldNum" sz="quarter" idx="5"/>
+          </p:nvPr>
+        </p:nvSpPr>
+        <p:spPr/>
+        <p:txBody>
+          <a:bodyPr/>
+          <a:lstStyle/>
+          <a:p>
+            <a:fld id="{BD97B567-DCFF-45C4-B2F4-05D37AC39A4E}" type="slidenum">
+              <a:rPr kumimoji="1" lang="ja-JP" altLang="en-US" smtClean="0"/>
+              <a:t>4</a:t>
+            </a:fld>
+            <a:endParaRPr kumimoji="1" lang="ja-JP" altLang="en-US"/>
+          </a:p>
+        </p:txBody>
+      </p:sp>
+    </p:spTree>
+    <p:extLst>
+      <p:ext uri="{BB962C8B-B14F-4D97-AF65-F5344CB8AC3E}">
+        <p14:creationId xmlns:p14="http://schemas.microsoft.com/office/powerpoint/2010/main" val="488787573"/>
+      </p:ext>
+    </p:extLst>
+  </p:cSld>
+  <p:clrMapOvr>
+    <a:masterClrMapping/>
+  </p:clrMapOvr>
+</p:notes>
+</file>
+
+<file path=ppt/notesSlides/notesSlide5.xml><?xml version="1.0" encoding="utf-8"?>
+<p:notes xmlns:a="http://schemas.openxmlformats.org/drawingml/2006/main" xmlns:r="http://schemas.openxmlformats.org/officeDocument/2006/relationships" xmlns:p="http://schemas.openxmlformats.org/presentationml/2006/main">
+  <p:cSld>
+    <p:spTree>
+      <p:nvGrpSpPr>
+        <p:cNvPr id="1" name=""/>
+        <p:cNvGrpSpPr/>
+        <p:nvPr/>
+      </p:nvGrpSpPr>
+      <p:grpSpPr>
+        <a:xfrm>
+          <a:off x="0" y="0"/>
+          <a:ext cx="0" cy="0"/>
+          <a:chOff x="0" y="0"/>
+          <a:chExt cx="0" cy="0"/>
+        </a:xfrm>
+      </p:grpSpPr>
+      <p:sp>
+        <p:nvSpPr>
+          <p:cNvPr id="2" name="スライド イメージ プレースホルダー 1"/>
+          <p:cNvSpPr>
+            <a:spLocks noGrp="1" noRot="1" noChangeAspect="1"/>
+          </p:cNvSpPr>
+          <p:nvPr>
+            <p:ph type="sldImg"/>
+          </p:nvPr>
+        </p:nvSpPr>
+        <p:spPr/>
+      </p:sp>
+      <p:sp>
+        <p:nvSpPr>
+          <p:cNvPr id="3" name="ノート プレースホルダー 2"/>
+          <p:cNvSpPr>
+            <a:spLocks noGrp="1"/>
+          </p:cNvSpPr>
+          <p:nvPr>
+            <p:ph type="body" idx="1"/>
+          </p:nvPr>
+        </p:nvSpPr>
+        <p:spPr/>
+        <p:txBody>
+          <a:bodyPr/>
+          <a:lstStyle/>
+          <a:p>
+            <a:r>
+              <a:rPr lang="ja-JP" altLang="en-US" b="1" dirty="0"/>
+              <a:t>利用者（ユーザー）</a:t>
+            </a:r>
+            <a:endParaRPr lang="ja-JP" altLang="en-US" dirty="0"/>
+          </a:p>
+          <a:p>
+            <a:pPr>
+              <a:buFont typeface="Arial" panose="020B0604020202020204" pitchFamily="34" charset="0"/>
+              <a:buChar char="•"/>
+            </a:pPr>
+            <a:r>
+              <a:rPr lang="ja-JP" altLang="en-US" dirty="0"/>
+              <a:t>システムを使う人です。画面を操作してリクエストを送ります。</a:t>
+            </a:r>
+          </a:p>
+          <a:p>
+            <a:r>
+              <a:rPr lang="en-US" altLang="ja-JP" b="1" dirty="0"/>
+              <a:t>Razor Pages</a:t>
+            </a:r>
+            <a:r>
+              <a:rPr lang="ja-JP" altLang="en-US" b="1" dirty="0"/>
+              <a:t>（画面）</a:t>
+            </a:r>
+            <a:endParaRPr lang="ja-JP" altLang="en-US" dirty="0"/>
+          </a:p>
+          <a:p>
+            <a:pPr>
+              <a:buFont typeface="Arial" panose="020B0604020202020204" pitchFamily="34" charset="0"/>
+              <a:buChar char="•"/>
+            </a:pPr>
+            <a:r>
+              <a:rPr lang="ja-JP" altLang="en-US" dirty="0"/>
+              <a:t>ユーザーが実際に目で見る「</a:t>
+            </a:r>
+            <a:r>
+              <a:rPr lang="en-US" altLang="ja-JP" dirty="0"/>
+              <a:t>Web</a:t>
+            </a:r>
+            <a:r>
+              <a:rPr lang="ja-JP" altLang="en-US" dirty="0"/>
+              <a:t>画面」のレイアウトを担当する部分です。操作を受け付けます。</a:t>
+            </a:r>
+          </a:p>
+          <a:p>
+            <a:r>
+              <a:rPr lang="en-US" altLang="ja-JP" b="1" dirty="0" err="1"/>
+              <a:t>PageModel</a:t>
+            </a:r>
+            <a:r>
+              <a:rPr lang="ja-JP" altLang="en-US" b="1" dirty="0"/>
+              <a:t>（処理制御）</a:t>
+            </a:r>
+            <a:endParaRPr lang="ja-JP" altLang="en-US" dirty="0"/>
+          </a:p>
+          <a:p>
+            <a:pPr>
+              <a:buFont typeface="Arial" panose="020B0604020202020204" pitchFamily="34" charset="0"/>
+              <a:buChar char="•"/>
+            </a:pPr>
+            <a:r>
+              <a:rPr lang="ja-JP" altLang="en-US" dirty="0"/>
+              <a:t>画面の裏側で動く「コントローラー」のような役割です。画面から送られてきたデータを受け取り、どのような処理を行うかのコントロール（制御）をします。</a:t>
+            </a:r>
+          </a:p>
+          <a:p>
+            <a:r>
+              <a:rPr lang="en-US" altLang="ja-JP" b="1" dirty="0"/>
+              <a:t>Service</a:t>
+            </a:r>
+            <a:r>
+              <a:rPr lang="ja-JP" altLang="en-US" b="1" dirty="0"/>
+              <a:t>（</a:t>
+            </a:r>
+            <a:r>
+              <a:rPr lang="en-US" altLang="ja-JP" b="1" dirty="0"/>
+              <a:t>DB</a:t>
+            </a:r>
+            <a:r>
+              <a:rPr lang="ja-JP" altLang="en-US" b="1" dirty="0"/>
+              <a:t>アクセス）</a:t>
+            </a:r>
+            <a:endParaRPr lang="ja-JP" altLang="en-US" dirty="0"/>
+          </a:p>
+          <a:p>
+            <a:pPr>
+              <a:buFont typeface="Arial" panose="020B0604020202020204" pitchFamily="34" charset="0"/>
+              <a:buChar char="•"/>
+            </a:pPr>
+            <a:r>
+              <a:rPr lang="ja-JP" altLang="en-US" dirty="0"/>
+              <a:t>データベースとやり取りをするための処理を担当する部分です。データを保存・更新するための命令を準備します。</a:t>
+            </a:r>
+          </a:p>
+          <a:p>
+            <a:r>
+              <a:rPr lang="en-US" altLang="ja-JP" b="1" dirty="0"/>
+              <a:t>SQL Server</a:t>
+            </a:r>
+            <a:r>
+              <a:rPr lang="ja-JP" altLang="en-US" b="1" dirty="0"/>
+              <a:t>（データ管理）</a:t>
+            </a:r>
+            <a:endParaRPr lang="ja-JP" altLang="en-US" dirty="0"/>
+          </a:p>
+          <a:p>
+            <a:pPr>
+              <a:buFont typeface="Arial" panose="020B0604020202020204" pitchFamily="34" charset="0"/>
+              <a:buChar char="•"/>
+            </a:pPr>
+            <a:r>
+              <a:rPr lang="ja-JP" altLang="en-US" dirty="0"/>
+              <a:t>最終的なデータを蓄積・管理する「データベース」です。</a:t>
+            </a:r>
+            <a:r>
+              <a:rPr lang="en-US" altLang="ja-JP" dirty="0"/>
+              <a:t>Service</a:t>
+            </a:r>
+            <a:r>
+              <a:rPr lang="ja-JP" altLang="en-US" dirty="0"/>
+              <a:t>からの命令を受けて、データが実際に更新されます。</a:t>
+            </a:r>
+          </a:p>
+          <a:p>
+            <a:endParaRPr kumimoji="1" lang="ja-JP" altLang="en-US" dirty="0"/>
+          </a:p>
+        </p:txBody>
+      </p:sp>
+      <p:sp>
+        <p:nvSpPr>
+          <p:cNvPr id="4" name="スライド番号プレースホルダー 3"/>
+          <p:cNvSpPr>
+            <a:spLocks noGrp="1"/>
+          </p:cNvSpPr>
+          <p:nvPr>
+            <p:ph type="sldNum" sz="quarter" idx="5"/>
+          </p:nvPr>
+        </p:nvSpPr>
+        <p:spPr/>
+        <p:txBody>
+          <a:bodyPr/>
+          <a:lstStyle/>
+          <a:p>
+            <a:fld id="{BD97B567-DCFF-45C4-B2F4-05D37AC39A4E}" type="slidenum">
+              <a:rPr kumimoji="1" lang="ja-JP" altLang="en-US" smtClean="0"/>
+              <a:t>5</a:t>
+            </a:fld>
+            <a:endParaRPr kumimoji="1" lang="ja-JP" altLang="en-US"/>
+          </a:p>
+        </p:txBody>
+      </p:sp>
+    </p:spTree>
+    <p:extLst>
+      <p:ext uri="{BB962C8B-B14F-4D97-AF65-F5344CB8AC3E}">
+        <p14:creationId xmlns:p14="http://schemas.microsoft.com/office/powerpoint/2010/main" val="1675271395"/>
+      </p:ext>
+    </p:extLst>
+  </p:cSld>
+  <p:clrMapOvr>
+    <a:masterClrMapping/>
+  </p:clrMapOvr>
+</p:notes>
+</file>
+
+<file path=ppt/notesSlides/notesSlide6.xml><?xml version="1.0" encoding="utf-8"?>
+<p:notes xmlns:a="http://schemas.openxmlformats.org/drawingml/2006/main" xmlns:r="http://schemas.openxmlformats.org/officeDocument/2006/relationships" xmlns:p="http://schemas.openxmlformats.org/presentationml/2006/main">
+  <p:cSld>
+    <p:spTree>
+      <p:nvGrpSpPr>
+        <p:cNvPr id="1" name=""/>
+        <p:cNvGrpSpPr/>
+        <p:nvPr/>
+      </p:nvGrpSpPr>
+      <p:grpSpPr>
+        <a:xfrm>
+          <a:off x="0" y="0"/>
+          <a:ext cx="0" cy="0"/>
+          <a:chOff x="0" y="0"/>
+          <a:chExt cx="0" cy="0"/>
+        </a:xfrm>
+      </p:grpSpPr>
+      <p:sp>
+        <p:nvSpPr>
+          <p:cNvPr id="2" name="スライド イメージ プレースホルダー 1"/>
+          <p:cNvSpPr>
+            <a:spLocks noGrp="1" noRot="1" noChangeAspect="1"/>
+          </p:cNvSpPr>
+          <p:nvPr>
+            <p:ph type="sldImg"/>
+          </p:nvPr>
+        </p:nvSpPr>
+        <p:spPr/>
+      </p:sp>
+      <p:sp>
+        <p:nvSpPr>
+          <p:cNvPr id="3" name="ノート プレースホルダー 2"/>
+          <p:cNvSpPr>
+            <a:spLocks noGrp="1"/>
+          </p:cNvSpPr>
+          <p:nvPr>
+            <p:ph type="body" idx="1"/>
+          </p:nvPr>
+        </p:nvSpPr>
+        <p:spPr/>
+        <p:txBody>
+          <a:bodyPr/>
+          <a:lstStyle/>
+          <a:p>
+            <a:r>
+              <a:rPr kumimoji="1" lang="ja-JP" altLang="en-US" dirty="0"/>
+              <a:t>使用技術の説明。</a:t>
+            </a:r>
+            <a:endParaRPr kumimoji="1" lang="en-US" altLang="ja-JP" dirty="0"/>
+          </a:p>
+          <a:p>
+            <a:r>
+              <a:rPr kumimoji="1" lang="en-US" altLang="ja-JP" dirty="0"/>
+              <a:t>CSS</a:t>
+            </a:r>
+            <a:r>
+              <a:rPr kumimoji="1" lang="ja-JP" altLang="en-US" dirty="0"/>
+              <a:t>はブートストラップにあるものを使用したので触ったわけではないことを説明</a:t>
+            </a:r>
+          </a:p>
+        </p:txBody>
+      </p:sp>
+      <p:sp>
+        <p:nvSpPr>
+          <p:cNvPr id="4" name="スライド番号プレースホルダー 3"/>
+          <p:cNvSpPr>
+            <a:spLocks noGrp="1"/>
+          </p:cNvSpPr>
+          <p:nvPr>
+            <p:ph type="sldNum" sz="quarter" idx="5"/>
+          </p:nvPr>
+        </p:nvSpPr>
+        <p:spPr/>
+        <p:txBody>
+          <a:bodyPr/>
+          <a:lstStyle/>
+          <a:p>
+            <a:fld id="{BD97B567-DCFF-45C4-B2F4-05D37AC39A4E}" type="slidenum">
+              <a:rPr kumimoji="1" lang="ja-JP" altLang="en-US" smtClean="0"/>
+              <a:t>6</a:t>
+            </a:fld>
+            <a:endParaRPr kumimoji="1" lang="ja-JP" altLang="en-US"/>
+          </a:p>
+        </p:txBody>
+      </p:sp>
+    </p:spTree>
+    <p:extLst>
+      <p:ext uri="{BB962C8B-B14F-4D97-AF65-F5344CB8AC3E}">
+        <p14:creationId xmlns:p14="http://schemas.microsoft.com/office/powerpoint/2010/main" val="1862089126"/>
+      </p:ext>
+    </p:extLst>
+  </p:cSld>
+  <p:clrMapOvr>
+    <a:masterClrMapping/>
+  </p:clrMapOvr>
+</p:notes>
+</file>
+
+<file path=ppt/notesSlides/notesSlide7.xml><?xml version="1.0" encoding="utf-8"?>
+<p:notes xmlns:a="http://schemas.openxmlformats.org/drawingml/2006/main" xmlns:r="http://schemas.openxmlformats.org/officeDocument/2006/relationships" xmlns:p="http://schemas.openxmlformats.org/presentationml/2006/main">
+  <p:cSld>
+    <p:spTree>
+      <p:nvGrpSpPr>
+        <p:cNvPr id="1" name=""/>
+        <p:cNvGrpSpPr/>
+        <p:nvPr/>
+      </p:nvGrpSpPr>
+      <p:grpSpPr>
+        <a:xfrm>
+          <a:off x="0" y="0"/>
+          <a:ext cx="0" cy="0"/>
+          <a:chOff x="0" y="0"/>
+          <a:chExt cx="0" cy="0"/>
+        </a:xfrm>
+      </p:grpSpPr>
+      <p:sp>
+        <p:nvSpPr>
+          <p:cNvPr id="2" name="スライド イメージ プレースホルダー 1"/>
+          <p:cNvSpPr>
+            <a:spLocks noGrp="1" noRot="1" noChangeAspect="1"/>
+          </p:cNvSpPr>
+          <p:nvPr>
+            <p:ph type="sldImg"/>
+          </p:nvPr>
+        </p:nvSpPr>
+        <p:spPr/>
+      </p:sp>
+      <p:sp>
+        <p:nvSpPr>
+          <p:cNvPr id="3" name="ノート プレースホルダー 2"/>
+          <p:cNvSpPr>
+            <a:spLocks noGrp="1"/>
+          </p:cNvSpPr>
+          <p:nvPr>
+            <p:ph type="body" idx="1"/>
+          </p:nvPr>
+        </p:nvSpPr>
+        <p:spPr/>
+        <p:txBody>
+          <a:bodyPr/>
+          <a:lstStyle/>
+          <a:p>
+            <a:r>
+              <a:rPr kumimoji="1" lang="ja-JP" altLang="en-US" dirty="0"/>
+              <a:t>時間の都合上、入力を伴う処理については事前にデータを準備しております。</a:t>
+            </a:r>
+          </a:p>
+          <a:p>
+            <a:r>
+              <a:rPr kumimoji="1" lang="ja-JP" altLang="en-US" dirty="0"/>
+              <a:t>今回は貸出・返却・履歴確認などの主要機能を中心にご紹介します。</a:t>
+            </a:r>
+          </a:p>
+        </p:txBody>
+      </p:sp>
+      <p:sp>
+        <p:nvSpPr>
+          <p:cNvPr id="4" name="スライド番号プレースホルダー 3"/>
+          <p:cNvSpPr>
+            <a:spLocks noGrp="1"/>
+          </p:cNvSpPr>
+          <p:nvPr>
+            <p:ph type="sldNum" sz="quarter" idx="5"/>
+          </p:nvPr>
+        </p:nvSpPr>
+        <p:spPr/>
+        <p:txBody>
+          <a:bodyPr/>
+          <a:lstStyle/>
+          <a:p>
+            <a:fld id="{BD97B567-DCFF-45C4-B2F4-05D37AC39A4E}" type="slidenum">
+              <a:rPr kumimoji="1" lang="ja-JP" altLang="en-US" smtClean="0"/>
+              <a:t>7</a:t>
+            </a:fld>
+            <a:endParaRPr kumimoji="1" lang="ja-JP" altLang="en-US"/>
+          </a:p>
+        </p:txBody>
+      </p:sp>
+    </p:spTree>
+    <p:extLst>
+      <p:ext uri="{BB962C8B-B14F-4D97-AF65-F5344CB8AC3E}">
+        <p14:creationId xmlns:p14="http://schemas.microsoft.com/office/powerpoint/2010/main" val="3457403644"/>
+      </p:ext>
+    </p:extLst>
+  </p:cSld>
+  <p:clrMapOvr>
+    <a:masterClrMapping/>
+  </p:clrMapOvr>
+</p:notes>
+</file>
+
+<file path=ppt/notesSlides/notesSlide8.xml><?xml version="1.0" encoding="utf-8"?>
+<p:notes xmlns:a="http://schemas.openxmlformats.org/drawingml/2006/main" xmlns:r="http://schemas.openxmlformats.org/officeDocument/2006/relationships" xmlns:p="http://schemas.openxmlformats.org/presentationml/2006/main">
+  <p:cSld>
+    <p:spTree>
+      <p:nvGrpSpPr>
+        <p:cNvPr id="1" name=""/>
+        <p:cNvGrpSpPr/>
+        <p:nvPr/>
+      </p:nvGrpSpPr>
+      <p:grpSpPr>
+        <a:xfrm>
+          <a:off x="0" y="0"/>
+          <a:ext cx="0" cy="0"/>
+          <a:chOff x="0" y="0"/>
+          <a:chExt cx="0" cy="0"/>
+        </a:xfrm>
+      </p:grpSpPr>
+      <p:sp>
+        <p:nvSpPr>
+          <p:cNvPr id="2" name="スライド イメージ プレースホルダー 1"/>
+          <p:cNvSpPr>
+            <a:spLocks noGrp="1" noRot="1" noChangeAspect="1"/>
+          </p:cNvSpPr>
+          <p:nvPr>
+            <p:ph type="sldImg"/>
+          </p:nvPr>
+        </p:nvSpPr>
+        <p:spPr/>
+      </p:sp>
+      <p:sp>
+        <p:nvSpPr>
+          <p:cNvPr id="3" name="ノート プレースホルダー 2"/>
+          <p:cNvSpPr>
+            <a:spLocks noGrp="1"/>
+          </p:cNvSpPr>
+          <p:nvPr>
+            <p:ph type="body" idx="1"/>
+          </p:nvPr>
+        </p:nvSpPr>
+        <p:spPr/>
+        <p:txBody>
+          <a:bodyPr/>
+          <a:lstStyle/>
+          <a:p>
+            <a:r>
+              <a:rPr kumimoji="1" lang="ja-JP" altLang="en-US" dirty="0"/>
+              <a:t>総合演習の所感を学んだこと、苦労したこと両面から説明</a:t>
+            </a:r>
+          </a:p>
+        </p:txBody>
+      </p:sp>
+      <p:sp>
+        <p:nvSpPr>
+          <p:cNvPr id="4" name="スライド番号プレースホルダー 3"/>
+          <p:cNvSpPr>
+            <a:spLocks noGrp="1"/>
+          </p:cNvSpPr>
+          <p:nvPr>
+            <p:ph type="sldNum" sz="quarter" idx="5"/>
+          </p:nvPr>
+        </p:nvSpPr>
+        <p:spPr/>
+        <p:txBody>
+          <a:bodyPr/>
+          <a:lstStyle/>
+          <a:p>
+            <a:fld id="{BD97B567-DCFF-45C4-B2F4-05D37AC39A4E}" type="slidenum">
+              <a:rPr kumimoji="1" lang="ja-JP" altLang="en-US" smtClean="0"/>
+              <a:t>8</a:t>
+            </a:fld>
+            <a:endParaRPr kumimoji="1" lang="ja-JP" altLang="en-US"/>
+          </a:p>
+        </p:txBody>
+      </p:sp>
+    </p:spTree>
+    <p:extLst>
+      <p:ext uri="{BB962C8B-B14F-4D97-AF65-F5344CB8AC3E}">
+        <p14:creationId xmlns:p14="http://schemas.microsoft.com/office/powerpoint/2010/main" val="30243804"/>
+      </p:ext>
+    </p:extLst>
+  </p:cSld>
+  <p:clrMapOvr>
+    <a:masterClrMapping/>
+  </p:clrMapOvr>
+</p:notes>
+</file>
+
+<file path=ppt/notesSlides/notesSlide9.xml><?xml version="1.0" encoding="utf-8"?>
+<p:notes xmlns:a="http://schemas.openxmlformats.org/drawingml/2006/main" xmlns:r="http://schemas.openxmlformats.org/officeDocument/2006/relationships" xmlns:p="http://schemas.openxmlformats.org/presentationml/2006/main">
+  <p:cSld>
+    <p:spTree>
+      <p:nvGrpSpPr>
+        <p:cNvPr id="1" name=""/>
+        <p:cNvGrpSpPr/>
+        <p:nvPr/>
+      </p:nvGrpSpPr>
+      <p:grpSpPr>
+        <a:xfrm>
+          <a:off x="0" y="0"/>
+          <a:ext cx="0" cy="0"/>
+          <a:chOff x="0" y="0"/>
+          <a:chExt cx="0" cy="0"/>
+        </a:xfrm>
+      </p:grpSpPr>
+      <p:sp>
+        <p:nvSpPr>
+          <p:cNvPr id="2" name="スライド イメージ プレースホルダー 1"/>
+          <p:cNvSpPr>
+            <a:spLocks noGrp="1" noRot="1" noChangeAspect="1"/>
+          </p:cNvSpPr>
+          <p:nvPr>
+            <p:ph type="sldImg"/>
+          </p:nvPr>
+        </p:nvSpPr>
+        <p:spPr/>
+      </p:sp>
+      <p:sp>
+        <p:nvSpPr>
+          <p:cNvPr id="3" name="ノート プレースホルダー 2"/>
+          <p:cNvSpPr>
+            <a:spLocks noGrp="1"/>
+          </p:cNvSpPr>
+          <p:nvPr>
+            <p:ph type="body" idx="1"/>
+          </p:nvPr>
+        </p:nvSpPr>
+        <p:spPr/>
+        <p:txBody>
+          <a:bodyPr/>
+          <a:lstStyle/>
+          <a:p>
+            <a:r>
+              <a:rPr kumimoji="1" lang="ja-JP" altLang="en-US" dirty="0"/>
+              <a:t>入門編では、アルゴリズム、条件分岐、繰り返し処理、配列、メソッド、クラスなど、プログラミングの基礎を学習しました。</a:t>
+            </a:r>
+            <a:endParaRPr kumimoji="1" lang="en-US" altLang="ja-JP" dirty="0"/>
+          </a:p>
+          <a:p>
+            <a:r>
+              <a:rPr kumimoji="1" lang="ja-JP" altLang="en-US" dirty="0"/>
+              <a:t>基礎編では、オーバーロード、</a:t>
+            </a:r>
+            <a:r>
+              <a:rPr kumimoji="1" lang="en-US" altLang="ja-JP" dirty="0"/>
+              <a:t>static</a:t>
+            </a:r>
+            <a:r>
+              <a:rPr kumimoji="1" lang="ja-JP" altLang="en-US" dirty="0"/>
+              <a:t>、カプセル化、継承、ポリモーフィズムなど、オブジェクト指向プログラミングについて学習しました。</a:t>
+            </a:r>
+            <a:endParaRPr kumimoji="1" lang="en-US" altLang="ja-JP" dirty="0"/>
+          </a:p>
+          <a:p>
+            <a:r>
+              <a:rPr kumimoji="1" lang="en-US" altLang="ja-JP" dirty="0"/>
+              <a:t>SQL Server</a:t>
+            </a:r>
+            <a:r>
+              <a:rPr kumimoji="1" lang="ja-JP" altLang="en-US" dirty="0"/>
+              <a:t>を利用したデータベース操作を学習し、</a:t>
+            </a:r>
+            <a:r>
+              <a:rPr lang="en-US" altLang="ja-JP" dirty="0"/>
+              <a:t>Windows </a:t>
+            </a:r>
+            <a:r>
+              <a:rPr lang="ja-JP" altLang="en-US" dirty="0"/>
+              <a:t>フォーム</a:t>
+            </a:r>
+            <a:r>
+              <a:rPr kumimoji="1" lang="ja-JP" altLang="en-US" dirty="0"/>
+              <a:t>を用いて</a:t>
+            </a:r>
+            <a:r>
+              <a:rPr kumimoji="1" lang="en-US" altLang="ja-JP" dirty="0"/>
+              <a:t>CRUD</a:t>
+            </a:r>
+            <a:r>
+              <a:rPr kumimoji="1" lang="ja-JP" altLang="en-US" dirty="0"/>
+              <a:t>処理の実装を経験しました。</a:t>
+            </a:r>
+            <a:endParaRPr kumimoji="1" lang="en-US" altLang="ja-JP" dirty="0"/>
+          </a:p>
+          <a:p>
+            <a:r>
+              <a:rPr kumimoji="1" lang="en-US" altLang="ja-JP" dirty="0"/>
+              <a:t>Web</a:t>
+            </a:r>
+            <a:r>
+              <a:rPr kumimoji="1" lang="ja-JP" altLang="en-US" dirty="0"/>
+              <a:t>編では、</a:t>
+            </a:r>
+            <a:r>
+              <a:rPr kumimoji="1" lang="en-US" altLang="ja-JP" dirty="0"/>
+              <a:t>Razor Pages</a:t>
+            </a:r>
+            <a:r>
+              <a:rPr kumimoji="1" lang="ja-JP" altLang="en-US" dirty="0"/>
+              <a:t>を利用した</a:t>
+            </a:r>
+            <a:r>
+              <a:rPr kumimoji="1" lang="en-US" altLang="ja-JP" dirty="0"/>
+              <a:t>Web</a:t>
+            </a:r>
+            <a:r>
+              <a:rPr kumimoji="1" lang="ja-JP" altLang="en-US" dirty="0"/>
+              <a:t>アプリケーション開発を学習しました。</a:t>
+            </a:r>
+          </a:p>
+        </p:txBody>
+      </p:sp>
+      <p:sp>
+        <p:nvSpPr>
+          <p:cNvPr id="4" name="スライド番号プレースホルダー 3"/>
+          <p:cNvSpPr>
+            <a:spLocks noGrp="1"/>
+          </p:cNvSpPr>
+          <p:nvPr>
+            <p:ph type="sldNum" sz="quarter" idx="5"/>
+          </p:nvPr>
+        </p:nvSpPr>
+        <p:spPr/>
+        <p:txBody>
+          <a:bodyPr/>
+          <a:lstStyle/>
+          <a:p>
+            <a:fld id="{BD97B567-DCFF-45C4-B2F4-05D37AC39A4E}" type="slidenum">
+              <a:rPr kumimoji="1" lang="ja-JP" altLang="en-US" smtClean="0"/>
+              <a:t>9</a:t>
+            </a:fld>
+            <a:endParaRPr kumimoji="1" lang="ja-JP" altLang="en-US"/>
+          </a:p>
+        </p:txBody>
+      </p:sp>
+    </p:spTree>
+    <p:extLst>
+      <p:ext uri="{BB962C8B-B14F-4D97-AF65-F5344CB8AC3E}">
+        <p14:creationId xmlns:p14="http://schemas.microsoft.com/office/powerpoint/2010/main" val="723858803"/>
+      </p:ext>
+    </p:extLst>
+  </p:cSld>
+  <p:clrMapOvr>
+    <a:masterClrMapping/>
+  </p:clrMapOvr>
+</p:notes>
+</file>
+
 <file path=ppt/slideLayouts/slideLayout1.xml><?xml version="1.0" encoding="utf-8"?>
 <p:sldLayout xmlns:a="http://schemas.openxmlformats.org/drawingml/2006/main" xmlns:r="http://schemas.openxmlformats.org/officeDocument/2006/relationships" xmlns:p="http://schemas.openxmlformats.org/presentationml/2006/main" type="title" preserve="1">
   <p:cSld name="タイトル スライド">
@@ -651,7 +1886,7 @@
           <a:p>
             <a:fld id="{F2FEFAF6-BFBA-484F-A347-DD539635B3C2}" type="datetimeFigureOut">
               <a:rPr kumimoji="1" lang="ja-JP" altLang="en-US" smtClean="0"/>
-              <a:t>2026/5/28</a:t>
+              <a:t>2026/5/29</a:t>
             </a:fld>
             <a:endParaRPr kumimoji="1" lang="ja-JP" altLang="en-US"/>
           </a:p>
@@ -881,7 +2116,7 @@
           <a:p>
             <a:fld id="{F2FEFAF6-BFBA-484F-A347-DD539635B3C2}" type="datetimeFigureOut">
               <a:rPr kumimoji="1" lang="ja-JP" altLang="en-US" smtClean="0"/>
-              <a:t>2026/5/28</a:t>
+              <a:t>2026/5/29</a:t>
             </a:fld>
             <a:endParaRPr kumimoji="1" lang="ja-JP" altLang="en-US"/>
           </a:p>
@@ -1121,7 +2356,7 @@
           <a:p>
             <a:fld id="{F2FEFAF6-BFBA-484F-A347-DD539635B3C2}" type="datetimeFigureOut">
               <a:rPr kumimoji="1" lang="ja-JP" altLang="en-US" smtClean="0"/>
-              <a:t>2026/5/28</a:t>
+              <a:t>2026/5/29</a:t>
             </a:fld>
             <a:endParaRPr kumimoji="1" lang="ja-JP" altLang="en-US"/>
           </a:p>
@@ -1351,7 +2586,7 @@
           <a:p>
             <a:fld id="{F2FEFAF6-BFBA-484F-A347-DD539635B3C2}" type="datetimeFigureOut">
               <a:rPr kumimoji="1" lang="ja-JP" altLang="en-US" smtClean="0"/>
-              <a:t>2026/5/28</a:t>
+              <a:t>2026/5/29</a:t>
             </a:fld>
             <a:endParaRPr kumimoji="1" lang="ja-JP" altLang="en-US"/>
           </a:p>
@@ -1626,7 +2861,7 @@
           <a:p>
             <a:fld id="{F2FEFAF6-BFBA-484F-A347-DD539635B3C2}" type="datetimeFigureOut">
               <a:rPr kumimoji="1" lang="ja-JP" altLang="en-US" smtClean="0"/>
-              <a:t>2026/5/28</a:t>
+              <a:t>2026/5/29</a:t>
             </a:fld>
             <a:endParaRPr kumimoji="1" lang="ja-JP" altLang="en-US"/>
           </a:p>
@@ -1955,7 +3190,7 @@
           <a:p>
             <a:fld id="{F2FEFAF6-BFBA-484F-A347-DD539635B3C2}" type="datetimeFigureOut">
               <a:rPr kumimoji="1" lang="ja-JP" altLang="en-US" smtClean="0"/>
-              <a:t>2026/5/28</a:t>
+              <a:t>2026/5/29</a:t>
             </a:fld>
             <a:endParaRPr kumimoji="1" lang="ja-JP" altLang="en-US"/>
           </a:p>
@@ -2431,7 +3666,7 @@
           <a:p>
             <a:fld id="{F2FEFAF6-BFBA-484F-A347-DD539635B3C2}" type="datetimeFigureOut">
               <a:rPr kumimoji="1" lang="ja-JP" altLang="en-US" smtClean="0"/>
-              <a:t>2026/5/28</a:t>
+              <a:t>2026/5/29</a:t>
             </a:fld>
             <a:endParaRPr kumimoji="1" lang="ja-JP" altLang="en-US"/>
           </a:p>
@@ -2572,7 +3807,7 @@
           <a:p>
             <a:fld id="{F2FEFAF6-BFBA-484F-A347-DD539635B3C2}" type="datetimeFigureOut">
               <a:rPr kumimoji="1" lang="ja-JP" altLang="en-US" smtClean="0"/>
-              <a:t>2026/5/28</a:t>
+              <a:t>2026/5/29</a:t>
             </a:fld>
             <a:endParaRPr kumimoji="1" lang="ja-JP" altLang="en-US"/>
           </a:p>
@@ -2685,7 +3920,7 @@
           <a:p>
             <a:fld id="{F2FEFAF6-BFBA-484F-A347-DD539635B3C2}" type="datetimeFigureOut">
               <a:rPr kumimoji="1" lang="ja-JP" altLang="en-US" smtClean="0"/>
-              <a:t>2026/5/28</a:t>
+              <a:t>2026/5/29</a:t>
             </a:fld>
             <a:endParaRPr kumimoji="1" lang="ja-JP" altLang="en-US"/>
           </a:p>
@@ -3028,7 +4263,7 @@
           <a:p>
             <a:fld id="{F2FEFAF6-BFBA-484F-A347-DD539635B3C2}" type="datetimeFigureOut">
               <a:rPr kumimoji="1" lang="ja-JP" altLang="en-US" smtClean="0"/>
-              <a:t>2026/5/28</a:t>
+              <a:t>2026/5/29</a:t>
             </a:fld>
             <a:endParaRPr kumimoji="1" lang="ja-JP" altLang="en-US"/>
           </a:p>
@@ -3316,7 +4551,7 @@
           <a:p>
             <a:fld id="{F2FEFAF6-BFBA-484F-A347-DD539635B3C2}" type="datetimeFigureOut">
               <a:rPr kumimoji="1" lang="ja-JP" altLang="en-US" smtClean="0"/>
-              <a:t>2026/5/28</a:t>
+              <a:t>2026/5/29</a:t>
             </a:fld>
             <a:endParaRPr kumimoji="1" lang="ja-JP" altLang="en-US"/>
           </a:p>
@@ -3589,7 +4824,7 @@
           <a:p>
             <a:fld id="{F2FEFAF6-BFBA-484F-A347-DD539635B3C2}" type="datetimeFigureOut">
               <a:rPr kumimoji="1" lang="ja-JP" altLang="en-US" smtClean="0"/>
-              <a:t>2026/5/28</a:t>
+              <a:t>2026/5/29</a:t>
             </a:fld>
             <a:endParaRPr kumimoji="1" lang="ja-JP" altLang="en-US"/>
           </a:p>
@@ -4024,7 +5259,7 @@
         </p:nvSpPr>
         <p:spPr>
           <a:xfrm>
-            <a:off x="1524000" y="1328737"/>
+            <a:off x="1524000" y="1938337"/>
             <a:ext cx="9144000" cy="2471737"/>
           </a:xfrm>
         </p:spPr>
@@ -4081,7 +5316,7 @@
         </p:nvSpPr>
         <p:spPr>
           <a:xfrm>
-            <a:off x="4133850" y="5529263"/>
+            <a:off x="5276850" y="5743575"/>
             <a:ext cx="8058150" cy="877887"/>
           </a:xfrm>
         </p:spPr>
@@ -4104,6 +5339,279 @@
     <p:extLst>
       <p:ext uri="{BB962C8B-B14F-4D97-AF65-F5344CB8AC3E}">
         <p14:creationId xmlns:p14="http://schemas.microsoft.com/office/powerpoint/2010/main" val="3337475618"/>
+      </p:ext>
+    </p:extLst>
+  </p:cSld>
+  <p:clrMapOvr>
+    <a:masterClrMapping/>
+  </p:clrMapOvr>
+</p:sld>
+</file>
+
+<file path=ppt/slides/slide10.xml><?xml version="1.0" encoding="utf-8"?>
+<p:sld xmlns:a="http://schemas.openxmlformats.org/drawingml/2006/main" xmlns:r="http://schemas.openxmlformats.org/officeDocument/2006/relationships" xmlns:p="http://schemas.openxmlformats.org/presentationml/2006/main">
+  <p:cSld>
+    <p:spTree>
+      <p:nvGrpSpPr>
+        <p:cNvPr id="1" name=""/>
+        <p:cNvGrpSpPr/>
+        <p:nvPr/>
+      </p:nvGrpSpPr>
+      <p:grpSpPr>
+        <a:xfrm>
+          <a:off x="0" y="0"/>
+          <a:ext cx="0" cy="0"/>
+          <a:chOff x="0" y="0"/>
+          <a:chExt cx="0" cy="0"/>
+        </a:xfrm>
+      </p:grpSpPr>
+      <p:sp>
+        <p:nvSpPr>
+          <p:cNvPr id="2" name="タイトル 1">
+            <a:extLst>
+              <a:ext uri="{FF2B5EF4-FFF2-40B4-BE49-F238E27FC236}">
+                <a16:creationId xmlns:a16="http://schemas.microsoft.com/office/drawing/2014/main" id="{0C569D8B-F13B-4EEB-848C-07D8B6399149}"/>
+              </a:ext>
+            </a:extLst>
+          </p:cNvPr>
+          <p:cNvSpPr>
+            <a:spLocks noGrp="1"/>
+          </p:cNvSpPr>
+          <p:nvPr>
+            <p:ph type="title"/>
+          </p:nvPr>
+        </p:nvSpPr>
+        <p:spPr/>
+        <p:txBody>
+          <a:bodyPr/>
+          <a:lstStyle/>
+          <a:p>
+            <a:r>
+              <a:rPr kumimoji="1" lang="ja-JP" altLang="en-US" dirty="0">
+                <a:latin typeface="+mj-ea"/>
+              </a:rPr>
+              <a:t>まとめ</a:t>
+            </a:r>
+          </a:p>
+        </p:txBody>
+      </p:sp>
+      <p:sp>
+        <p:nvSpPr>
+          <p:cNvPr id="3" name="コンテンツ プレースホルダー 2">
+            <a:extLst>
+              <a:ext uri="{FF2B5EF4-FFF2-40B4-BE49-F238E27FC236}">
+                <a16:creationId xmlns:a16="http://schemas.microsoft.com/office/drawing/2014/main" id="{E89FE1EB-09A4-4B24-AA9B-41856D02A1AB}"/>
+              </a:ext>
+            </a:extLst>
+          </p:cNvPr>
+          <p:cNvSpPr>
+            <a:spLocks noGrp="1"/>
+          </p:cNvSpPr>
+          <p:nvPr>
+            <p:ph idx="1"/>
+          </p:nvPr>
+        </p:nvSpPr>
+        <p:spPr>
+          <a:xfrm>
+            <a:off x="658906" y="1490570"/>
+            <a:ext cx="10278035" cy="5163670"/>
+          </a:xfrm>
+        </p:spPr>
+        <p:txBody>
+          <a:bodyPr/>
+          <a:lstStyle/>
+          <a:p>
+            <a:pPr marL="0" indent="0">
+              <a:lnSpc>
+                <a:spcPct val="200000"/>
+              </a:lnSpc>
+              <a:buNone/>
+            </a:pPr>
+            <a:r>
+              <a:rPr lang="en-US" altLang="ja-JP" dirty="0"/>
+              <a:t>【</a:t>
+            </a:r>
+            <a:r>
+              <a:rPr lang="ja-JP" altLang="en-US" dirty="0"/>
+              <a:t>今後に向けて</a:t>
+            </a:r>
+            <a:r>
+              <a:rPr lang="en-US" altLang="ja-JP" dirty="0"/>
+              <a:t>】</a:t>
+            </a:r>
+          </a:p>
+          <a:p>
+            <a:pPr marL="0" indent="0">
+              <a:lnSpc>
+                <a:spcPct val="100000"/>
+              </a:lnSpc>
+              <a:buNone/>
+            </a:pPr>
+            <a:r>
+              <a:rPr lang="ja-JP" altLang="en-US" sz="2400" dirty="0"/>
+              <a:t>研修を通じて、プログラミングの基礎から</a:t>
+            </a:r>
+            <a:r>
+              <a:rPr lang="en-US" altLang="ja-JP" sz="2400" dirty="0"/>
+              <a:t>Web</a:t>
+            </a:r>
+            <a:r>
+              <a:rPr lang="ja-JP" altLang="en-US" sz="2400" dirty="0"/>
+              <a:t>アプリケーション開発まで幅広く学ぶことができました。</a:t>
+            </a:r>
+            <a:endParaRPr lang="en-US" altLang="ja-JP" sz="2400" dirty="0"/>
+          </a:p>
+          <a:p>
+            <a:pPr marL="0" indent="0">
+              <a:lnSpc>
+                <a:spcPct val="150000"/>
+              </a:lnSpc>
+              <a:buNone/>
+            </a:pPr>
+            <a:r>
+              <a:rPr lang="ja-JP" altLang="en-US" sz="2400" dirty="0"/>
+              <a:t>今後は研修で身につけた知識を実務で活用しながら、より実践的な技術や業務知識を習得していきたいと考えています。</a:t>
+            </a:r>
+            <a:endParaRPr lang="en-US" altLang="ja-JP" sz="2400" dirty="0"/>
+          </a:p>
+          <a:p>
+            <a:pPr marL="0" indent="0">
+              <a:lnSpc>
+                <a:spcPct val="150000"/>
+              </a:lnSpc>
+              <a:buNone/>
+            </a:pPr>
+            <a:r>
+              <a:rPr lang="ja-JP" altLang="en-US" sz="2400" dirty="0"/>
+              <a:t>また、開発だけでなくデータベースやインフラについても学習を継続し、幅広い視点でシステムに関わることができるエンジニアを目指したいです。</a:t>
+            </a:r>
+            <a:endParaRPr lang="en-US" altLang="ja-JP" sz="2400" dirty="0"/>
+          </a:p>
+          <a:p>
+            <a:pPr marL="0" indent="0">
+              <a:lnSpc>
+                <a:spcPct val="100000"/>
+              </a:lnSpc>
+              <a:buNone/>
+            </a:pPr>
+            <a:endParaRPr lang="en-US" altLang="ja-JP" dirty="0"/>
+          </a:p>
+        </p:txBody>
+      </p:sp>
+    </p:spTree>
+    <p:extLst>
+      <p:ext uri="{BB962C8B-B14F-4D97-AF65-F5344CB8AC3E}">
+        <p14:creationId xmlns:p14="http://schemas.microsoft.com/office/powerpoint/2010/main" val="2853450087"/>
+      </p:ext>
+    </p:extLst>
+  </p:cSld>
+  <p:clrMapOvr>
+    <a:masterClrMapping/>
+  </p:clrMapOvr>
+</p:sld>
+</file>
+
+<file path=ppt/slides/slide11.xml><?xml version="1.0" encoding="utf-8"?>
+<p:sld xmlns:a="http://schemas.openxmlformats.org/drawingml/2006/main" xmlns:r="http://schemas.openxmlformats.org/officeDocument/2006/relationships" xmlns:p="http://schemas.openxmlformats.org/presentationml/2006/main">
+  <p:cSld>
+    <p:spTree>
+      <p:nvGrpSpPr>
+        <p:cNvPr id="1" name=""/>
+        <p:cNvGrpSpPr/>
+        <p:nvPr/>
+      </p:nvGrpSpPr>
+      <p:grpSpPr>
+        <a:xfrm>
+          <a:off x="0" y="0"/>
+          <a:ext cx="0" cy="0"/>
+          <a:chOff x="0" y="0"/>
+          <a:chExt cx="0" cy="0"/>
+        </a:xfrm>
+      </p:grpSpPr>
+      <p:sp>
+        <p:nvSpPr>
+          <p:cNvPr id="2" name="タイトル 1">
+            <a:extLst>
+              <a:ext uri="{FF2B5EF4-FFF2-40B4-BE49-F238E27FC236}">
+                <a16:creationId xmlns:a16="http://schemas.microsoft.com/office/drawing/2014/main" id="{C98A297C-B9E2-C663-3F37-7E8663338CBB}"/>
+              </a:ext>
+            </a:extLst>
+          </p:cNvPr>
+          <p:cNvSpPr>
+            <a:spLocks noGrp="1"/>
+          </p:cNvSpPr>
+          <p:nvPr>
+            <p:ph type="ctrTitle"/>
+          </p:nvPr>
+        </p:nvSpPr>
+        <p:spPr>
+          <a:xfrm>
+            <a:off x="1075764" y="2846575"/>
+            <a:ext cx="10040471" cy="1164850"/>
+          </a:xfrm>
+        </p:spPr>
+        <p:txBody>
+          <a:bodyPr>
+            <a:normAutofit/>
+          </a:bodyPr>
+          <a:lstStyle/>
+          <a:p>
+            <a:pPr>
+              <a:lnSpc>
+                <a:spcPct val="100000"/>
+              </a:lnSpc>
+            </a:pPr>
+            <a:r>
+              <a:rPr kumimoji="1" lang="ja-JP" altLang="en-US" sz="5400" dirty="0">
+                <a:latin typeface="游ゴシック" panose="020B0400000000000000" pitchFamily="50" charset="-128"/>
+                <a:ea typeface="游ゴシック" panose="020B0400000000000000" pitchFamily="50" charset="-128"/>
+              </a:rPr>
+              <a:t>ご清聴ありがとうございました</a:t>
+            </a:r>
+          </a:p>
+        </p:txBody>
+      </p:sp>
+      <p:sp>
+        <p:nvSpPr>
+          <p:cNvPr id="6" name="フッター プレースホルダー 5">
+            <a:extLst>
+              <a:ext uri="{FF2B5EF4-FFF2-40B4-BE49-F238E27FC236}">
+                <a16:creationId xmlns:a16="http://schemas.microsoft.com/office/drawing/2014/main" id="{93C90E47-6256-4804-BFF9-25BDDC54097D}"/>
+              </a:ext>
+            </a:extLst>
+          </p:cNvPr>
+          <p:cNvSpPr>
+            <a:spLocks noGrp="1"/>
+          </p:cNvSpPr>
+          <p:nvPr>
+            <p:ph type="ftr" sz="quarter" idx="11"/>
+          </p:nvPr>
+        </p:nvSpPr>
+        <p:spPr>
+          <a:xfrm>
+            <a:off x="5276850" y="5743575"/>
+            <a:ext cx="8058150" cy="877887"/>
+          </a:xfrm>
+        </p:spPr>
+        <p:txBody>
+          <a:bodyPr/>
+          <a:lstStyle/>
+          <a:p>
+            <a:r>
+              <a:rPr kumimoji="1" lang="ja-JP" altLang="en-US" sz="2400" dirty="0">
+                <a:solidFill>
+                  <a:schemeClr val="tx1"/>
+                </a:solidFill>
+              </a:rPr>
+              <a:t>株式会社マプコン 中澤 拓也</a:t>
+            </a:r>
+          </a:p>
+        </p:txBody>
+      </p:sp>
+    </p:spTree>
+    <p:extLst>
+      <p:ext uri="{BB962C8B-B14F-4D97-AF65-F5344CB8AC3E}">
+        <p14:creationId xmlns:p14="http://schemas.microsoft.com/office/powerpoint/2010/main" val="3120312771"/>
       </p:ext>
     </p:extLst>
   </p:cSld>
@@ -4146,7 +5654,12 @@
             <p:ph type="title"/>
           </p:nvPr>
         </p:nvSpPr>
-        <p:spPr/>
+        <p:spPr>
+          <a:xfrm>
+            <a:off x="838200" y="634066"/>
+            <a:ext cx="10515600" cy="1325563"/>
+          </a:xfrm>
+        </p:spPr>
         <p:txBody>
           <a:bodyPr/>
           <a:lstStyle/>
@@ -4177,8 +5690,8 @@
         </p:nvSpPr>
         <p:spPr>
           <a:xfrm>
-            <a:off x="838200" y="1825625"/>
-            <a:ext cx="3876675" cy="3517900"/>
+            <a:off x="838200" y="2355849"/>
+            <a:ext cx="4762500" cy="3517900"/>
           </a:xfrm>
         </p:spPr>
         <p:txBody>
@@ -4196,7 +5709,7 @@
             </a:pPr>
             <a:r>
               <a:rPr lang="ja-JP" altLang="en-US" dirty="0"/>
-              <a:t>システム概要</a:t>
+              <a:t>システム概要・主要機能</a:t>
             </a:r>
             <a:endParaRPr lang="en-US" altLang="ja-JP" dirty="0"/>
           </a:p>
@@ -4224,7 +5737,7 @@
             </a:pPr>
             <a:r>
               <a:rPr lang="ja-JP" altLang="en-US" dirty="0"/>
-              <a:t>システム構成</a:t>
+              <a:t>アプリケーション構成</a:t>
             </a:r>
             <a:endParaRPr lang="en-US" altLang="ja-JP" dirty="0"/>
           </a:p>
@@ -4251,13 +5764,19 @@
               <a:buAutoNum type="arabicPeriod"/>
             </a:pPr>
             <a:r>
-              <a:rPr lang="en-US" altLang="ja-JP" dirty="0"/>
-              <a:t>DB</a:t>
-            </a:r>
-            <a:r>
               <a:rPr lang="ja-JP" altLang="en-US" dirty="0"/>
-              <a:t>設計</a:t>
-            </a:r>
+              <a:t>デモンストレーション</a:t>
+            </a:r>
+            <a:endParaRPr lang="en-US" altLang="zh-TW" dirty="0"/>
+          </a:p>
+          <a:p>
+            <a:pPr marL="514350" indent="-514350">
+              <a:lnSpc>
+                <a:spcPct val="150000"/>
+              </a:lnSpc>
+              <a:buFont typeface="+mj-lt"/>
+              <a:buAutoNum type="arabicPeriod"/>
+            </a:pPr>
             <a:endParaRPr lang="en-US" altLang="ja-JP" dirty="0"/>
           </a:p>
           <a:p>
@@ -4299,7 +5818,7 @@
         </p:nvSpPr>
         <p:spPr>
           <a:xfrm>
-            <a:off x="5538789" y="1825625"/>
+            <a:off x="6424614" y="2376487"/>
             <a:ext cx="4605336" cy="3517900"/>
           </a:xfrm>
           <a:prstGeom prst="rect">
@@ -4308,7 +5827,7 @@
         </p:spPr>
         <p:txBody>
           <a:bodyPr vert="horz" lIns="91440" tIns="45720" rIns="91440" bIns="45720" rtlCol="0">
-            <a:normAutofit fontScale="92500" lnSpcReduction="10000"/>
+            <a:normAutofit/>
           </a:bodyPr>
           <a:lstStyle>
             <a:lvl1pPr marL="228600" indent="-228600" algn="l" defTabSz="914400" rtl="0" eaLnBrk="1" latinLnBrk="0" hangingPunct="1">
@@ -4480,35 +5999,7 @@
                 <a:spcPct val="150000"/>
               </a:lnSpc>
               <a:buFont typeface="+mj-lt"/>
-              <a:buAutoNum type="arabicPeriod" startAt="6"/>
-            </a:pPr>
-            <a:r>
-              <a:rPr lang="zh-TW" altLang="en-US" dirty="0"/>
-              <a:t>主要機能紹介</a:t>
-            </a:r>
-            <a:endParaRPr lang="en-US" altLang="zh-TW" dirty="0"/>
-          </a:p>
-          <a:p>
-            <a:pPr marL="514350" indent="-514350">
-              <a:lnSpc>
-                <a:spcPct val="150000"/>
-              </a:lnSpc>
-              <a:buFont typeface="+mj-lt"/>
-              <a:buAutoNum type="arabicPeriod" startAt="6"/>
-            </a:pPr>
-            <a:r>
-              <a:rPr lang="ja-JP" altLang="en-US" dirty="0"/>
-              <a:t>デモンストレーション</a:t>
-            </a:r>
-            <a:endParaRPr lang="en-US" altLang="ja-JP" dirty="0"/>
-          </a:p>
-          <a:p>
-            <a:pPr marL="514350" indent="-514350">
-              <a:lnSpc>
-                <a:spcPct val="150000"/>
-              </a:lnSpc>
-              <a:buFont typeface="+mj-lt"/>
-              <a:buAutoNum type="arabicPeriod" startAt="6"/>
+              <a:buAutoNum type="arabicPeriod" startAt="5"/>
             </a:pPr>
             <a:r>
               <a:rPr lang="ja-JP" altLang="en-US" dirty="0"/>
@@ -4522,7 +6013,7 @@
                 <a:spcPct val="150000"/>
               </a:lnSpc>
               <a:buFont typeface="+mj-lt"/>
-              <a:buAutoNum type="arabicPeriod" startAt="6"/>
+              <a:buAutoNum type="arabicPeriod" startAt="5"/>
             </a:pPr>
             <a:r>
               <a:rPr lang="ja-JP" altLang="en-US" dirty="0"/>
@@ -4536,7 +6027,7 @@
                 <a:spcPct val="150000"/>
               </a:lnSpc>
               <a:buFont typeface="+mj-lt"/>
-              <a:buAutoNum type="arabicPeriod" startAt="6"/>
+              <a:buAutoNum type="arabicPeriod" startAt="5"/>
             </a:pPr>
             <a:r>
               <a:rPr lang="ja-JP" altLang="en-US" dirty="0"/>
@@ -4546,29 +6037,53 @@
           </a:p>
           <a:p>
             <a:pPr marL="514350" indent="-514350">
+              <a:lnSpc>
+                <a:spcPct val="150000"/>
+              </a:lnSpc>
               <a:buFont typeface="+mj-lt"/>
-              <a:buAutoNum type="arabicPeriod" startAt="6"/>
+              <a:buAutoNum type="arabicPeriod" startAt="5"/>
+            </a:pPr>
+            <a:r>
+              <a:rPr lang="ja-JP" altLang="en-US" dirty="0"/>
+              <a:t>質疑応答</a:t>
+            </a:r>
+            <a:endParaRPr lang="en-US" altLang="ja-JP" dirty="0"/>
+          </a:p>
+          <a:p>
+            <a:pPr marL="514350" indent="-514350">
+              <a:lnSpc>
+                <a:spcPct val="150000"/>
+              </a:lnSpc>
+              <a:buFont typeface="+mj-lt"/>
+              <a:buAutoNum type="arabicPeriod" startAt="5"/>
             </a:pPr>
             <a:endParaRPr lang="en-US" altLang="ja-JP" dirty="0"/>
           </a:p>
           <a:p>
             <a:pPr marL="514350" indent="-514350">
               <a:buFont typeface="+mj-lt"/>
-              <a:buAutoNum type="arabicPeriod" startAt="6"/>
+              <a:buAutoNum type="arabicPeriod" startAt="5"/>
             </a:pPr>
             <a:endParaRPr lang="en-US" altLang="ja-JP" dirty="0"/>
           </a:p>
           <a:p>
             <a:pPr marL="514350" indent="-514350">
               <a:buFont typeface="+mj-lt"/>
-              <a:buAutoNum type="arabicPeriod" startAt="6"/>
+              <a:buAutoNum type="arabicPeriod" startAt="5"/>
             </a:pPr>
             <a:endParaRPr lang="en-US" altLang="ja-JP" dirty="0"/>
           </a:p>
           <a:p>
             <a:pPr marL="514350" indent="-514350">
               <a:buFont typeface="+mj-lt"/>
-              <a:buAutoNum type="arabicPeriod" startAt="6"/>
+              <a:buAutoNum type="arabicPeriod" startAt="5"/>
+            </a:pPr>
+            <a:endParaRPr lang="en-US" altLang="ja-JP" dirty="0"/>
+          </a:p>
+          <a:p>
+            <a:pPr marL="514350" indent="-514350">
+              <a:buFont typeface="+mj-lt"/>
+              <a:buAutoNum type="arabicPeriod" startAt="5"/>
             </a:pPr>
             <a:endParaRPr lang="ja-JP" altLang="en-US" dirty="0"/>
           </a:p>
@@ -4627,7 +6142,7 @@
           <a:p>
             <a:r>
               <a:rPr lang="ja-JP" altLang="en-US" dirty="0"/>
-              <a:t>システム概要</a:t>
+              <a:t>システム概要・主要機能</a:t>
             </a:r>
             <a:endParaRPr kumimoji="1" lang="ja-JP" altLang="en-US" dirty="0"/>
           </a:p>
@@ -4648,51 +6163,675 @@
           <p:nvPr>
             <p:ph idx="1"/>
           </p:nvPr>
-        </p:nvSpPr>
-        <p:spPr/>
-        <p:txBody>
-          <a:bodyPr/>
-          <a:lstStyle/>
-          <a:p>
-            <a:endParaRPr kumimoji="1" lang="ja-JP" altLang="en-US" dirty="0"/>
-          </a:p>
-        </p:txBody>
-      </p:sp>
-      <p:sp>
-        <p:nvSpPr>
-          <p:cNvPr id="5" name="テキスト ボックス 4">
-            <a:extLst>
-              <a:ext uri="{FF2B5EF4-FFF2-40B4-BE49-F238E27FC236}">
-                <a16:creationId xmlns:a16="http://schemas.microsoft.com/office/drawing/2014/main" id="{F0BA8D3E-C664-402D-92D6-32CC72079E50}"/>
-              </a:ext>
-            </a:extLst>
-          </p:cNvPr>
-          <p:cNvSpPr txBox="1"/>
-          <p:nvPr/>
         </p:nvSpPr>
         <p:spPr>
           <a:xfrm>
-            <a:off x="3046810" y="3244334"/>
-            <a:ext cx="6093618" cy="369332"/>
+            <a:off x="838200" y="1481136"/>
+            <a:ext cx="4862513" cy="4775200"/>
+          </a:xfrm>
+        </p:spPr>
+        <p:txBody>
+          <a:bodyPr/>
+          <a:lstStyle/>
+          <a:p>
+            <a:pPr marL="0" indent="0">
+              <a:buNone/>
+            </a:pPr>
+            <a:r>
+              <a:rPr lang="en-US" altLang="ja-JP" dirty="0"/>
+              <a:t>【</a:t>
+            </a:r>
+            <a:r>
+              <a:rPr lang="ja-JP" altLang="en-US" dirty="0"/>
+              <a:t>システム概要</a:t>
+            </a:r>
+            <a:r>
+              <a:rPr lang="en-US" altLang="ja-JP" dirty="0"/>
+              <a:t>】</a:t>
+            </a:r>
+          </a:p>
+          <a:p>
+            <a:pPr marL="0" indent="0">
+              <a:lnSpc>
+                <a:spcPct val="150000"/>
+              </a:lnSpc>
+              <a:buNone/>
+            </a:pPr>
+            <a:r>
+              <a:rPr lang="ja-JP" altLang="en-US" sz="2000" dirty="0"/>
+              <a:t>蔵書の貸出・返却状況管理 </a:t>
+            </a:r>
+            <a:endParaRPr lang="en-US" altLang="ja-JP" sz="2000" dirty="0"/>
+          </a:p>
+          <a:p>
+            <a:pPr marL="0" indent="0">
+              <a:buNone/>
+            </a:pPr>
+            <a:r>
+              <a:rPr lang="en-US" altLang="ja-JP" sz="2000" dirty="0"/>
+              <a:t>Web</a:t>
+            </a:r>
+            <a:r>
+              <a:rPr lang="ja-JP" altLang="en-US" sz="2000" dirty="0"/>
+              <a:t>アプリケーション</a:t>
+            </a:r>
+            <a:endParaRPr lang="en-US" altLang="ja-JP" sz="2000" dirty="0"/>
+          </a:p>
+          <a:p>
+            <a:pPr marL="0" indent="0">
+              <a:lnSpc>
+                <a:spcPct val="150000"/>
+              </a:lnSpc>
+              <a:buNone/>
+            </a:pPr>
+            <a:r>
+              <a:rPr kumimoji="1" lang="en-US" altLang="ja-JP" dirty="0"/>
+              <a:t>【</a:t>
+            </a:r>
+            <a:r>
+              <a:rPr kumimoji="1" lang="ja-JP" altLang="en-US" dirty="0"/>
+              <a:t>主要機能</a:t>
+            </a:r>
+            <a:r>
+              <a:rPr kumimoji="1" lang="en-US" altLang="ja-JP" dirty="0"/>
+              <a:t>】</a:t>
+            </a:r>
+            <a:endParaRPr lang="en-US" altLang="ja-JP" sz="1800" dirty="0"/>
+          </a:p>
+          <a:p>
+            <a:pPr>
+              <a:lnSpc>
+                <a:spcPct val="150000"/>
+              </a:lnSpc>
+            </a:pPr>
+            <a:endParaRPr kumimoji="1" lang="ja-JP" altLang="en-US" sz="1800" dirty="0"/>
+          </a:p>
+        </p:txBody>
+      </p:sp>
+      <p:sp>
+        <p:nvSpPr>
+          <p:cNvPr id="6" name="コンテンツ プレースホルダー 2">
+            <a:extLst>
+              <a:ext uri="{FF2B5EF4-FFF2-40B4-BE49-F238E27FC236}">
+                <a16:creationId xmlns:a16="http://schemas.microsoft.com/office/drawing/2014/main" id="{FFC73E9E-1C02-4DBD-B8EF-D45ACEE8DC81}"/>
+              </a:ext>
+            </a:extLst>
+          </p:cNvPr>
+          <p:cNvSpPr txBox="1">
+            <a:spLocks/>
+          </p:cNvSpPr>
+          <p:nvPr/>
+        </p:nvSpPr>
+        <p:spPr>
+          <a:xfrm>
+            <a:off x="539643" y="3717080"/>
+            <a:ext cx="2505076" cy="2597152"/>
           </a:xfrm>
           <a:prstGeom prst="rect">
             <a:avLst/>
           </a:prstGeom>
-          <a:noFill/>
         </p:spPr>
         <p:txBody>
-          <a:bodyPr wrap="square">
-            <a:spAutoFit/>
+          <a:bodyPr vert="horz" lIns="91440" tIns="45720" rIns="91440" bIns="45720" rtlCol="0">
+            <a:normAutofit fontScale="92500" lnSpcReduction="20000"/>
           </a:bodyPr>
-          <a:lstStyle/>
-          <a:p>
-            <a:r>
-              <a:rPr lang="ja-JP" altLang="en-US" dirty="0"/>
-              <a:t>使用技術</a:t>
-            </a:r>
-          </a:p>
-        </p:txBody>
-      </p:sp>
+          <a:lstStyle>
+            <a:lvl1pPr marL="228600" indent="-228600" algn="l" defTabSz="914400" rtl="0" eaLnBrk="1" latinLnBrk="0" hangingPunct="1">
+              <a:lnSpc>
+                <a:spcPct val="90000"/>
+              </a:lnSpc>
+              <a:spcBef>
+                <a:spcPts val="1000"/>
+              </a:spcBef>
+              <a:buFont typeface="Arial" panose="020B0604020202020204" pitchFamily="34" charset="0"/>
+              <a:buChar char="•"/>
+              <a:defRPr kumimoji="1" sz="2800" kern="1200">
+                <a:solidFill>
+                  <a:schemeClr val="tx1"/>
+                </a:solidFill>
+                <a:latin typeface="+mn-lt"/>
+                <a:ea typeface="+mn-ea"/>
+                <a:cs typeface="+mn-cs"/>
+              </a:defRPr>
+            </a:lvl1pPr>
+            <a:lvl2pPr marL="685800" indent="-228600" algn="l" defTabSz="914400" rtl="0" eaLnBrk="1" latinLnBrk="0" hangingPunct="1">
+              <a:lnSpc>
+                <a:spcPct val="90000"/>
+              </a:lnSpc>
+              <a:spcBef>
+                <a:spcPts val="500"/>
+              </a:spcBef>
+              <a:buFont typeface="Arial" panose="020B0604020202020204" pitchFamily="34" charset="0"/>
+              <a:buChar char="•"/>
+              <a:defRPr kumimoji="1" sz="2400" kern="1200">
+                <a:solidFill>
+                  <a:schemeClr val="tx1"/>
+                </a:solidFill>
+                <a:latin typeface="+mn-lt"/>
+                <a:ea typeface="+mn-ea"/>
+                <a:cs typeface="+mn-cs"/>
+              </a:defRPr>
+            </a:lvl2pPr>
+            <a:lvl3pPr marL="1143000" indent="-228600" algn="l" defTabSz="914400" rtl="0" eaLnBrk="1" latinLnBrk="0" hangingPunct="1">
+              <a:lnSpc>
+                <a:spcPct val="90000"/>
+              </a:lnSpc>
+              <a:spcBef>
+                <a:spcPts val="500"/>
+              </a:spcBef>
+              <a:buFont typeface="Arial" panose="020B0604020202020204" pitchFamily="34" charset="0"/>
+              <a:buChar char="•"/>
+              <a:defRPr kumimoji="1" sz="2000" kern="1200">
+                <a:solidFill>
+                  <a:schemeClr val="tx1"/>
+                </a:solidFill>
+                <a:latin typeface="+mn-lt"/>
+                <a:ea typeface="+mn-ea"/>
+                <a:cs typeface="+mn-cs"/>
+              </a:defRPr>
+            </a:lvl3pPr>
+            <a:lvl4pPr marL="1600200" indent="-228600" algn="l" defTabSz="914400" rtl="0" eaLnBrk="1" latinLnBrk="0" hangingPunct="1">
+              <a:lnSpc>
+                <a:spcPct val="90000"/>
+              </a:lnSpc>
+              <a:spcBef>
+                <a:spcPts val="500"/>
+              </a:spcBef>
+              <a:buFont typeface="Arial" panose="020B0604020202020204" pitchFamily="34" charset="0"/>
+              <a:buChar char="•"/>
+              <a:defRPr kumimoji="1" sz="1800" kern="1200">
+                <a:solidFill>
+                  <a:schemeClr val="tx1"/>
+                </a:solidFill>
+                <a:latin typeface="+mn-lt"/>
+                <a:ea typeface="+mn-ea"/>
+                <a:cs typeface="+mn-cs"/>
+              </a:defRPr>
+            </a:lvl4pPr>
+            <a:lvl5pPr marL="2057400" indent="-228600" algn="l" defTabSz="914400" rtl="0" eaLnBrk="1" latinLnBrk="0" hangingPunct="1">
+              <a:lnSpc>
+                <a:spcPct val="90000"/>
+              </a:lnSpc>
+              <a:spcBef>
+                <a:spcPts val="500"/>
+              </a:spcBef>
+              <a:buFont typeface="Arial" panose="020B0604020202020204" pitchFamily="34" charset="0"/>
+              <a:buChar char="•"/>
+              <a:defRPr kumimoji="1" sz="1800" kern="1200">
+                <a:solidFill>
+                  <a:schemeClr val="tx1"/>
+                </a:solidFill>
+                <a:latin typeface="+mn-lt"/>
+                <a:ea typeface="+mn-ea"/>
+                <a:cs typeface="+mn-cs"/>
+              </a:defRPr>
+            </a:lvl5pPr>
+            <a:lvl6pPr marL="2514600" indent="-228600" algn="l" defTabSz="914400" rtl="0" eaLnBrk="1" latinLnBrk="0" hangingPunct="1">
+              <a:lnSpc>
+                <a:spcPct val="90000"/>
+              </a:lnSpc>
+              <a:spcBef>
+                <a:spcPts val="500"/>
+              </a:spcBef>
+              <a:buFont typeface="Arial" panose="020B0604020202020204" pitchFamily="34" charset="0"/>
+              <a:buChar char="•"/>
+              <a:defRPr kumimoji="1" sz="1800" kern="1200">
+                <a:solidFill>
+                  <a:schemeClr val="tx1"/>
+                </a:solidFill>
+                <a:latin typeface="+mn-lt"/>
+                <a:ea typeface="+mn-ea"/>
+                <a:cs typeface="+mn-cs"/>
+              </a:defRPr>
+            </a:lvl6pPr>
+            <a:lvl7pPr marL="2971800" indent="-228600" algn="l" defTabSz="914400" rtl="0" eaLnBrk="1" latinLnBrk="0" hangingPunct="1">
+              <a:lnSpc>
+                <a:spcPct val="90000"/>
+              </a:lnSpc>
+              <a:spcBef>
+                <a:spcPts val="500"/>
+              </a:spcBef>
+              <a:buFont typeface="Arial" panose="020B0604020202020204" pitchFamily="34" charset="0"/>
+              <a:buChar char="•"/>
+              <a:defRPr kumimoji="1" sz="1800" kern="1200">
+                <a:solidFill>
+                  <a:schemeClr val="tx1"/>
+                </a:solidFill>
+                <a:latin typeface="+mn-lt"/>
+                <a:ea typeface="+mn-ea"/>
+                <a:cs typeface="+mn-cs"/>
+              </a:defRPr>
+            </a:lvl7pPr>
+            <a:lvl8pPr marL="3429000" indent="-228600" algn="l" defTabSz="914400" rtl="0" eaLnBrk="1" latinLnBrk="0" hangingPunct="1">
+              <a:lnSpc>
+                <a:spcPct val="90000"/>
+              </a:lnSpc>
+              <a:spcBef>
+                <a:spcPts val="500"/>
+              </a:spcBef>
+              <a:buFont typeface="Arial" panose="020B0604020202020204" pitchFamily="34" charset="0"/>
+              <a:buChar char="•"/>
+              <a:defRPr kumimoji="1" sz="1800" kern="1200">
+                <a:solidFill>
+                  <a:schemeClr val="tx1"/>
+                </a:solidFill>
+                <a:latin typeface="+mn-lt"/>
+                <a:ea typeface="+mn-ea"/>
+                <a:cs typeface="+mn-cs"/>
+              </a:defRPr>
+            </a:lvl8pPr>
+            <a:lvl9pPr marL="3886200" indent="-228600" algn="l" defTabSz="914400" rtl="0" eaLnBrk="1" latinLnBrk="0" hangingPunct="1">
+              <a:lnSpc>
+                <a:spcPct val="90000"/>
+              </a:lnSpc>
+              <a:spcBef>
+                <a:spcPts val="500"/>
+              </a:spcBef>
+              <a:buFont typeface="Arial" panose="020B0604020202020204" pitchFamily="34" charset="0"/>
+              <a:buChar char="•"/>
+              <a:defRPr kumimoji="1" sz="1800" kern="1200">
+                <a:solidFill>
+                  <a:schemeClr val="tx1"/>
+                </a:solidFill>
+                <a:latin typeface="+mn-lt"/>
+                <a:ea typeface="+mn-ea"/>
+                <a:cs typeface="+mn-cs"/>
+              </a:defRPr>
+            </a:lvl9pPr>
+          </a:lstStyle>
+          <a:p>
+            <a:pPr>
+              <a:lnSpc>
+                <a:spcPct val="150000"/>
+              </a:lnSpc>
+            </a:pPr>
+            <a:r>
+              <a:rPr lang="ja-JP" altLang="en-US" sz="2200" dirty="0"/>
+              <a:t>ログイン機能</a:t>
+            </a:r>
+            <a:r>
+              <a:rPr lang="en-US" altLang="ja-JP" sz="2200" dirty="0"/>
+              <a:t>	</a:t>
+            </a:r>
+          </a:p>
+          <a:p>
+            <a:pPr>
+              <a:lnSpc>
+                <a:spcPct val="150000"/>
+              </a:lnSpc>
+            </a:pPr>
+            <a:r>
+              <a:rPr lang="ja-JP" altLang="en-US" sz="2200" dirty="0"/>
+              <a:t>蔵書新規追加</a:t>
+            </a:r>
+            <a:endParaRPr lang="en-US" altLang="ja-JP" sz="2200" dirty="0"/>
+          </a:p>
+          <a:p>
+            <a:pPr>
+              <a:lnSpc>
+                <a:spcPct val="150000"/>
+              </a:lnSpc>
+            </a:pPr>
+            <a:r>
+              <a:rPr lang="ja-JP" altLang="en-US" sz="2200" dirty="0"/>
+              <a:t>蔵書一覧表示</a:t>
+            </a:r>
+            <a:endParaRPr lang="en-US" altLang="ja-JP" sz="2200" dirty="0"/>
+          </a:p>
+          <a:p>
+            <a:pPr>
+              <a:lnSpc>
+                <a:spcPct val="150000"/>
+              </a:lnSpc>
+            </a:pPr>
+            <a:r>
+              <a:rPr lang="ja-JP" altLang="en-US" sz="2200" dirty="0"/>
+              <a:t>蔵書詳細表示</a:t>
+            </a:r>
+            <a:endParaRPr lang="en-US" altLang="ja-JP" sz="2200" dirty="0"/>
+          </a:p>
+          <a:p>
+            <a:pPr>
+              <a:lnSpc>
+                <a:spcPct val="150000"/>
+              </a:lnSpc>
+            </a:pPr>
+            <a:r>
+              <a:rPr lang="ja-JP" altLang="en-US" sz="2200" dirty="0"/>
+              <a:t>貸出履歴確認</a:t>
+            </a:r>
+            <a:endParaRPr lang="en-US" altLang="ja-JP" sz="2200" dirty="0"/>
+          </a:p>
+          <a:p>
+            <a:pPr>
+              <a:lnSpc>
+                <a:spcPct val="150000"/>
+              </a:lnSpc>
+            </a:pPr>
+            <a:endParaRPr lang="en-US" altLang="ja-JP" sz="1800" dirty="0"/>
+          </a:p>
+          <a:p>
+            <a:pPr>
+              <a:lnSpc>
+                <a:spcPct val="150000"/>
+              </a:lnSpc>
+            </a:pPr>
+            <a:endParaRPr lang="ja-JP" altLang="en-US" sz="1800" dirty="0"/>
+          </a:p>
+        </p:txBody>
+      </p:sp>
+      <p:sp>
+        <p:nvSpPr>
+          <p:cNvPr id="7" name="コンテンツ プレースホルダー 2">
+            <a:extLst>
+              <a:ext uri="{FF2B5EF4-FFF2-40B4-BE49-F238E27FC236}">
+                <a16:creationId xmlns:a16="http://schemas.microsoft.com/office/drawing/2014/main" id="{5CC0841E-9FC2-4AE2-9936-F77822181163}"/>
+              </a:ext>
+            </a:extLst>
+          </p:cNvPr>
+          <p:cNvSpPr txBox="1">
+            <a:spLocks/>
+          </p:cNvSpPr>
+          <p:nvPr/>
+        </p:nvSpPr>
+        <p:spPr>
+          <a:xfrm>
+            <a:off x="2533089" y="3704842"/>
+            <a:ext cx="2505076" cy="2301874"/>
+          </a:xfrm>
+          <a:prstGeom prst="rect">
+            <a:avLst/>
+          </a:prstGeom>
+        </p:spPr>
+        <p:txBody>
+          <a:bodyPr vert="horz" lIns="91440" tIns="45720" rIns="91440" bIns="45720" rtlCol="0">
+            <a:normAutofit/>
+          </a:bodyPr>
+          <a:lstStyle>
+            <a:lvl1pPr marL="228600" indent="-228600" algn="l" defTabSz="914400" rtl="0" eaLnBrk="1" latinLnBrk="0" hangingPunct="1">
+              <a:lnSpc>
+                <a:spcPct val="90000"/>
+              </a:lnSpc>
+              <a:spcBef>
+                <a:spcPts val="1000"/>
+              </a:spcBef>
+              <a:buFont typeface="Arial" panose="020B0604020202020204" pitchFamily="34" charset="0"/>
+              <a:buChar char="•"/>
+              <a:defRPr kumimoji="1" sz="2800" kern="1200">
+                <a:solidFill>
+                  <a:schemeClr val="tx1"/>
+                </a:solidFill>
+                <a:latin typeface="+mn-lt"/>
+                <a:ea typeface="+mn-ea"/>
+                <a:cs typeface="+mn-cs"/>
+              </a:defRPr>
+            </a:lvl1pPr>
+            <a:lvl2pPr marL="685800" indent="-228600" algn="l" defTabSz="914400" rtl="0" eaLnBrk="1" latinLnBrk="0" hangingPunct="1">
+              <a:lnSpc>
+                <a:spcPct val="90000"/>
+              </a:lnSpc>
+              <a:spcBef>
+                <a:spcPts val="500"/>
+              </a:spcBef>
+              <a:buFont typeface="Arial" panose="020B0604020202020204" pitchFamily="34" charset="0"/>
+              <a:buChar char="•"/>
+              <a:defRPr kumimoji="1" sz="2400" kern="1200">
+                <a:solidFill>
+                  <a:schemeClr val="tx1"/>
+                </a:solidFill>
+                <a:latin typeface="+mn-lt"/>
+                <a:ea typeface="+mn-ea"/>
+                <a:cs typeface="+mn-cs"/>
+              </a:defRPr>
+            </a:lvl2pPr>
+            <a:lvl3pPr marL="1143000" indent="-228600" algn="l" defTabSz="914400" rtl="0" eaLnBrk="1" latinLnBrk="0" hangingPunct="1">
+              <a:lnSpc>
+                <a:spcPct val="90000"/>
+              </a:lnSpc>
+              <a:spcBef>
+                <a:spcPts val="500"/>
+              </a:spcBef>
+              <a:buFont typeface="Arial" panose="020B0604020202020204" pitchFamily="34" charset="0"/>
+              <a:buChar char="•"/>
+              <a:defRPr kumimoji="1" sz="2000" kern="1200">
+                <a:solidFill>
+                  <a:schemeClr val="tx1"/>
+                </a:solidFill>
+                <a:latin typeface="+mn-lt"/>
+                <a:ea typeface="+mn-ea"/>
+                <a:cs typeface="+mn-cs"/>
+              </a:defRPr>
+            </a:lvl3pPr>
+            <a:lvl4pPr marL="1600200" indent="-228600" algn="l" defTabSz="914400" rtl="0" eaLnBrk="1" latinLnBrk="0" hangingPunct="1">
+              <a:lnSpc>
+                <a:spcPct val="90000"/>
+              </a:lnSpc>
+              <a:spcBef>
+                <a:spcPts val="500"/>
+              </a:spcBef>
+              <a:buFont typeface="Arial" panose="020B0604020202020204" pitchFamily="34" charset="0"/>
+              <a:buChar char="•"/>
+              <a:defRPr kumimoji="1" sz="1800" kern="1200">
+                <a:solidFill>
+                  <a:schemeClr val="tx1"/>
+                </a:solidFill>
+                <a:latin typeface="+mn-lt"/>
+                <a:ea typeface="+mn-ea"/>
+                <a:cs typeface="+mn-cs"/>
+              </a:defRPr>
+            </a:lvl4pPr>
+            <a:lvl5pPr marL="2057400" indent="-228600" algn="l" defTabSz="914400" rtl="0" eaLnBrk="1" latinLnBrk="0" hangingPunct="1">
+              <a:lnSpc>
+                <a:spcPct val="90000"/>
+              </a:lnSpc>
+              <a:spcBef>
+                <a:spcPts val="500"/>
+              </a:spcBef>
+              <a:buFont typeface="Arial" panose="020B0604020202020204" pitchFamily="34" charset="0"/>
+              <a:buChar char="•"/>
+              <a:defRPr kumimoji="1" sz="1800" kern="1200">
+                <a:solidFill>
+                  <a:schemeClr val="tx1"/>
+                </a:solidFill>
+                <a:latin typeface="+mn-lt"/>
+                <a:ea typeface="+mn-ea"/>
+                <a:cs typeface="+mn-cs"/>
+              </a:defRPr>
+            </a:lvl5pPr>
+            <a:lvl6pPr marL="2514600" indent="-228600" algn="l" defTabSz="914400" rtl="0" eaLnBrk="1" latinLnBrk="0" hangingPunct="1">
+              <a:lnSpc>
+                <a:spcPct val="90000"/>
+              </a:lnSpc>
+              <a:spcBef>
+                <a:spcPts val="500"/>
+              </a:spcBef>
+              <a:buFont typeface="Arial" panose="020B0604020202020204" pitchFamily="34" charset="0"/>
+              <a:buChar char="•"/>
+              <a:defRPr kumimoji="1" sz="1800" kern="1200">
+                <a:solidFill>
+                  <a:schemeClr val="tx1"/>
+                </a:solidFill>
+                <a:latin typeface="+mn-lt"/>
+                <a:ea typeface="+mn-ea"/>
+                <a:cs typeface="+mn-cs"/>
+              </a:defRPr>
+            </a:lvl6pPr>
+            <a:lvl7pPr marL="2971800" indent="-228600" algn="l" defTabSz="914400" rtl="0" eaLnBrk="1" latinLnBrk="0" hangingPunct="1">
+              <a:lnSpc>
+                <a:spcPct val="90000"/>
+              </a:lnSpc>
+              <a:spcBef>
+                <a:spcPts val="500"/>
+              </a:spcBef>
+              <a:buFont typeface="Arial" panose="020B0604020202020204" pitchFamily="34" charset="0"/>
+              <a:buChar char="•"/>
+              <a:defRPr kumimoji="1" sz="1800" kern="1200">
+                <a:solidFill>
+                  <a:schemeClr val="tx1"/>
+                </a:solidFill>
+                <a:latin typeface="+mn-lt"/>
+                <a:ea typeface="+mn-ea"/>
+                <a:cs typeface="+mn-cs"/>
+              </a:defRPr>
+            </a:lvl7pPr>
+            <a:lvl8pPr marL="3429000" indent="-228600" algn="l" defTabSz="914400" rtl="0" eaLnBrk="1" latinLnBrk="0" hangingPunct="1">
+              <a:lnSpc>
+                <a:spcPct val="90000"/>
+              </a:lnSpc>
+              <a:spcBef>
+                <a:spcPts val="500"/>
+              </a:spcBef>
+              <a:buFont typeface="Arial" panose="020B0604020202020204" pitchFamily="34" charset="0"/>
+              <a:buChar char="•"/>
+              <a:defRPr kumimoji="1" sz="1800" kern="1200">
+                <a:solidFill>
+                  <a:schemeClr val="tx1"/>
+                </a:solidFill>
+                <a:latin typeface="+mn-lt"/>
+                <a:ea typeface="+mn-ea"/>
+                <a:cs typeface="+mn-cs"/>
+              </a:defRPr>
+            </a:lvl8pPr>
+            <a:lvl9pPr marL="3886200" indent="-228600" algn="l" defTabSz="914400" rtl="0" eaLnBrk="1" latinLnBrk="0" hangingPunct="1">
+              <a:lnSpc>
+                <a:spcPct val="90000"/>
+              </a:lnSpc>
+              <a:spcBef>
+                <a:spcPts val="500"/>
+              </a:spcBef>
+              <a:buFont typeface="Arial" panose="020B0604020202020204" pitchFamily="34" charset="0"/>
+              <a:buChar char="•"/>
+              <a:defRPr kumimoji="1" sz="1800" kern="1200">
+                <a:solidFill>
+                  <a:schemeClr val="tx1"/>
+                </a:solidFill>
+                <a:latin typeface="+mn-lt"/>
+                <a:ea typeface="+mn-ea"/>
+                <a:cs typeface="+mn-cs"/>
+              </a:defRPr>
+            </a:lvl9pPr>
+          </a:lstStyle>
+          <a:p>
+            <a:pPr>
+              <a:lnSpc>
+                <a:spcPct val="150000"/>
+              </a:lnSpc>
+            </a:pPr>
+            <a:r>
+              <a:rPr lang="ja-JP" altLang="en-US" sz="2000" dirty="0"/>
+              <a:t>蔵書削除機能</a:t>
+            </a:r>
+            <a:endParaRPr lang="en-US" altLang="ja-JP" sz="2000" dirty="0"/>
+          </a:p>
+          <a:p>
+            <a:pPr>
+              <a:lnSpc>
+                <a:spcPct val="150000"/>
+              </a:lnSpc>
+            </a:pPr>
+            <a:r>
+              <a:rPr lang="ja-JP" altLang="en-US" sz="2000" dirty="0"/>
+              <a:t>キーワード検索</a:t>
+            </a:r>
+            <a:endParaRPr lang="en-US" altLang="ja-JP" sz="2000" dirty="0"/>
+          </a:p>
+          <a:p>
+            <a:pPr>
+              <a:lnSpc>
+                <a:spcPct val="150000"/>
+              </a:lnSpc>
+            </a:pPr>
+            <a:r>
+              <a:rPr lang="ja-JP" altLang="en-US" sz="2000" dirty="0"/>
+              <a:t>貸出処理</a:t>
+            </a:r>
+            <a:endParaRPr lang="en-US" altLang="ja-JP" sz="2000" dirty="0"/>
+          </a:p>
+          <a:p>
+            <a:pPr>
+              <a:lnSpc>
+                <a:spcPct val="150000"/>
+              </a:lnSpc>
+            </a:pPr>
+            <a:r>
+              <a:rPr lang="ja-JP" altLang="en-US" sz="2000" dirty="0"/>
+              <a:t>返却処理</a:t>
+            </a:r>
+            <a:endParaRPr lang="en-US" altLang="ja-JP" sz="2000" dirty="0"/>
+          </a:p>
+          <a:p>
+            <a:pPr>
+              <a:lnSpc>
+                <a:spcPct val="150000"/>
+              </a:lnSpc>
+            </a:pPr>
+            <a:endParaRPr lang="en-US" altLang="ja-JP" sz="1800" dirty="0"/>
+          </a:p>
+          <a:p>
+            <a:pPr>
+              <a:lnSpc>
+                <a:spcPct val="150000"/>
+              </a:lnSpc>
+            </a:pPr>
+            <a:endParaRPr lang="en-US" altLang="ja-JP" sz="1800" dirty="0"/>
+          </a:p>
+          <a:p>
+            <a:pPr marL="0" indent="0">
+              <a:lnSpc>
+                <a:spcPct val="150000"/>
+              </a:lnSpc>
+              <a:buNone/>
+            </a:pPr>
+            <a:endParaRPr lang="en-US" altLang="ja-JP" sz="1800" dirty="0"/>
+          </a:p>
+          <a:p>
+            <a:pPr>
+              <a:lnSpc>
+                <a:spcPct val="150000"/>
+              </a:lnSpc>
+            </a:pPr>
+            <a:endParaRPr lang="en-US" altLang="ja-JP" sz="1800" dirty="0"/>
+          </a:p>
+          <a:p>
+            <a:pPr>
+              <a:lnSpc>
+                <a:spcPct val="150000"/>
+              </a:lnSpc>
+            </a:pPr>
+            <a:endParaRPr lang="ja-JP" altLang="en-US" sz="1800" dirty="0"/>
+          </a:p>
+        </p:txBody>
+      </p:sp>
+      <p:pic>
+        <p:nvPicPr>
+          <p:cNvPr id="11" name="図 10">
+            <a:extLst>
+              <a:ext uri="{FF2B5EF4-FFF2-40B4-BE49-F238E27FC236}">
+                <a16:creationId xmlns:a16="http://schemas.microsoft.com/office/drawing/2014/main" id="{19324375-4E66-4908-9A37-B81AABFD50D8}"/>
+              </a:ext>
+            </a:extLst>
+          </p:cNvPr>
+          <p:cNvPicPr>
+            <a:picLocks noChangeAspect="1"/>
+          </p:cNvPicPr>
+          <p:nvPr/>
+        </p:nvPicPr>
+        <p:blipFill>
+          <a:blip r:embed="rId3"/>
+          <a:stretch>
+            <a:fillRect/>
+          </a:stretch>
+        </p:blipFill>
+        <p:spPr>
+          <a:xfrm>
+            <a:off x="5038165" y="1690688"/>
+            <a:ext cx="6614192" cy="4537818"/>
+          </a:xfrm>
+          <a:prstGeom prst="rect">
+            <a:avLst/>
+          </a:prstGeom>
+        </p:spPr>
+      </p:pic>
     </p:spTree>
     <p:extLst>
       <p:ext uri="{BB962C8B-B14F-4D97-AF65-F5344CB8AC3E}">
@@ -4768,11 +6907,174 @@
             <p:ph idx="1"/>
           </p:nvPr>
         </p:nvSpPr>
-        <p:spPr/>
-        <p:txBody>
-          <a:bodyPr/>
-          <a:lstStyle/>
-          <a:p>
+        <p:spPr>
+          <a:xfrm>
+            <a:off x="838200" y="1565182"/>
+            <a:ext cx="10515600" cy="4927693"/>
+          </a:xfrm>
+        </p:spPr>
+        <p:txBody>
+          <a:bodyPr>
+            <a:normAutofit/>
+          </a:bodyPr>
+          <a:lstStyle/>
+          <a:p>
+            <a:pPr marL="0" indent="0">
+              <a:buNone/>
+            </a:pPr>
+            <a:r>
+              <a:rPr kumimoji="1" lang="en-US" altLang="ja-JP" dirty="0"/>
+              <a:t>【</a:t>
+            </a:r>
+            <a:r>
+              <a:rPr kumimoji="1" lang="ja-JP" altLang="en-US" dirty="0"/>
+              <a:t>業務面</a:t>
+            </a:r>
+            <a:r>
+              <a:rPr kumimoji="1" lang="en-US" altLang="ja-JP" dirty="0"/>
+              <a:t>】</a:t>
+            </a:r>
+          </a:p>
+          <a:p>
+            <a:pPr>
+              <a:lnSpc>
+                <a:spcPct val="150000"/>
+              </a:lnSpc>
+            </a:pPr>
+            <a:r>
+              <a:rPr lang="ja-JP" altLang="en-US" sz="2000" dirty="0"/>
+              <a:t>蔵書の貸出・返却状況を一元管理</a:t>
+            </a:r>
+            <a:endParaRPr lang="en-US" altLang="ja-JP" sz="2000" dirty="0"/>
+          </a:p>
+          <a:p>
+            <a:pPr>
+              <a:lnSpc>
+                <a:spcPct val="150000"/>
+              </a:lnSpc>
+            </a:pPr>
+            <a:r>
+              <a:rPr lang="ja-JP" altLang="en-US" sz="2000" dirty="0"/>
+              <a:t>貸出中の蔵書や貸出履歴を簡単に確認できるようにする</a:t>
+            </a:r>
+            <a:endParaRPr lang="en-US" altLang="ja-JP" sz="2000" dirty="0"/>
+          </a:p>
+          <a:p>
+            <a:pPr>
+              <a:lnSpc>
+                <a:spcPct val="150000"/>
+              </a:lnSpc>
+            </a:pPr>
+            <a:r>
+              <a:rPr lang="ja-JP" altLang="en-US" sz="2000" dirty="0"/>
+              <a:t>手作業による管理ミスを防止</a:t>
+            </a:r>
+            <a:endParaRPr lang="en-US" altLang="ja-JP" dirty="0"/>
+          </a:p>
+          <a:p>
+            <a:pPr marL="0" indent="0">
+              <a:lnSpc>
+                <a:spcPct val="150000"/>
+              </a:lnSpc>
+              <a:buNone/>
+            </a:pPr>
+            <a:r>
+              <a:rPr lang="en-US" altLang="ja-JP" dirty="0"/>
+              <a:t>【</a:t>
+            </a:r>
+            <a:r>
+              <a:rPr lang="ja-JP" altLang="en-US" dirty="0"/>
+              <a:t>学習面</a:t>
+            </a:r>
+            <a:r>
+              <a:rPr lang="en-US" altLang="ja-JP" dirty="0"/>
+              <a:t>】</a:t>
+            </a:r>
+          </a:p>
+          <a:p>
+            <a:pPr>
+              <a:lnSpc>
+                <a:spcPct val="150000"/>
+              </a:lnSpc>
+            </a:pPr>
+            <a:r>
+              <a:rPr lang="en-US" altLang="ja-JP" sz="2000" dirty="0"/>
+              <a:t>Razor Pages</a:t>
+            </a:r>
+            <a:r>
+              <a:rPr lang="ja-JP" altLang="en-US" sz="2000" dirty="0"/>
+              <a:t>を用いた</a:t>
+            </a:r>
+            <a:r>
+              <a:rPr lang="en-US" altLang="ja-JP" sz="2000" dirty="0"/>
+              <a:t>Web</a:t>
+            </a:r>
+            <a:r>
+              <a:rPr lang="ja-JP" altLang="en-US" sz="2000" dirty="0"/>
+              <a:t>アプリケーション開発の実践</a:t>
+            </a:r>
+            <a:endParaRPr lang="en-US" altLang="ja-JP" sz="2000" dirty="0"/>
+          </a:p>
+          <a:p>
+            <a:pPr>
+              <a:lnSpc>
+                <a:spcPct val="150000"/>
+              </a:lnSpc>
+            </a:pPr>
+            <a:r>
+              <a:rPr lang="en-US" altLang="ja-JP" sz="2000" dirty="0"/>
+              <a:t>C#</a:t>
+            </a:r>
+            <a:r>
+              <a:rPr lang="ja-JP" altLang="en-US" sz="2000" dirty="0"/>
+              <a:t>、</a:t>
+            </a:r>
+            <a:r>
+              <a:rPr lang="en-US" altLang="ja-JP" sz="2000" dirty="0"/>
+              <a:t>SQL Server</a:t>
+            </a:r>
+            <a:r>
+              <a:rPr lang="ja-JP" altLang="en-US" sz="2000" dirty="0"/>
+              <a:t>、</a:t>
+            </a:r>
+            <a:r>
+              <a:rPr lang="en-US" altLang="ja-JP" sz="2000" dirty="0"/>
+              <a:t>ADO.NET</a:t>
+            </a:r>
+            <a:r>
+              <a:rPr lang="ja-JP" altLang="en-US" sz="2000" dirty="0"/>
+              <a:t>を利用したデータベース連携を学ぶ</a:t>
+            </a:r>
+            <a:endParaRPr lang="en-US" altLang="ja-JP" sz="2000" dirty="0"/>
+          </a:p>
+          <a:p>
+            <a:pPr>
+              <a:lnSpc>
+                <a:spcPct val="150000"/>
+              </a:lnSpc>
+            </a:pPr>
+            <a:r>
+              <a:rPr lang="en-US" altLang="ja-JP" sz="2000" dirty="0"/>
+              <a:t>CRUD</a:t>
+            </a:r>
+            <a:r>
+              <a:rPr lang="ja-JP" altLang="en-US" sz="2000" dirty="0"/>
+              <a:t>処理の実装を通して</a:t>
+            </a:r>
+            <a:r>
+              <a:rPr lang="en-US" altLang="ja-JP" sz="2000" dirty="0"/>
+              <a:t>Web</a:t>
+            </a:r>
+            <a:r>
+              <a:rPr lang="ja-JP" altLang="en-US" sz="2000" dirty="0"/>
+              <a:t>システム開発の流れの理解</a:t>
+            </a:r>
+            <a:endParaRPr lang="en-US" altLang="ja-JP" sz="2000" b="1" dirty="0"/>
+          </a:p>
+          <a:p>
+            <a:pPr marL="0" indent="0">
+              <a:buNone/>
+            </a:pPr>
             <a:endParaRPr kumimoji="1" lang="ja-JP" altLang="en-US" dirty="0"/>
           </a:p>
         </p:txBody>
@@ -4807,6 +7109,40 @@
           <a:chExt cx="0" cy="0"/>
         </a:xfrm>
       </p:grpSpPr>
+      <p:pic>
+        <p:nvPicPr>
+          <p:cNvPr id="12" name="コンテンツ プレースホルダー 11">
+            <a:extLst>
+              <a:ext uri="{FF2B5EF4-FFF2-40B4-BE49-F238E27FC236}">
+                <a16:creationId xmlns:a16="http://schemas.microsoft.com/office/drawing/2014/main" id="{B19DEFA5-4081-4E31-B4BB-0BCC2389EF16}"/>
+              </a:ext>
+            </a:extLst>
+          </p:cNvPr>
+          <p:cNvPicPr>
+            <a:picLocks noGrp="1" noChangeAspect="1"/>
+          </p:cNvPicPr>
+          <p:nvPr>
+            <p:ph idx="1"/>
+          </p:nvPr>
+        </p:nvPicPr>
+        <p:blipFill rotWithShape="1">
+          <a:blip r:embed="rId3">
+            <a:extLst>
+              <a:ext uri="{28A0092B-C50C-407E-A947-70E740481C1C}">
+                <a14:useLocalDpi xmlns:a14="http://schemas.microsoft.com/office/drawing/2010/main" val="0"/>
+              </a:ext>
+            </a:extLst>
+          </a:blip>
+          <a:srcRect t="22467" b="42696"/>
+          <a:stretch/>
+        </p:blipFill>
+        <p:spPr>
+          <a:xfrm>
+            <a:off x="526676" y="3689279"/>
+            <a:ext cx="11138648" cy="2129739"/>
+          </a:xfrm>
+        </p:spPr>
+      </p:pic>
       <p:sp>
         <p:nvSpPr>
           <p:cNvPr id="2" name="タイトル 1">
@@ -4830,7 +7166,7 @@
           <a:p>
             <a:r>
               <a:rPr lang="ja-JP" altLang="en-US" dirty="0"/>
-              <a:t>システム構成</a:t>
+              <a:t>アプリケーション構成</a:t>
             </a:r>
             <a:endParaRPr kumimoji="1" lang="ja-JP" altLang="en-US" dirty="0"/>
           </a:p>
@@ -4838,26 +7174,57 @@
       </p:sp>
       <p:sp>
         <p:nvSpPr>
-          <p:cNvPr id="3" name="コンテンツ プレースホルダー 2">
-            <a:extLst>
-              <a:ext uri="{FF2B5EF4-FFF2-40B4-BE49-F238E27FC236}">
-                <a16:creationId xmlns:a16="http://schemas.microsoft.com/office/drawing/2014/main" id="{E89FE1EB-09A4-4B24-AA9B-41856D02A1AB}"/>
-              </a:ext>
-            </a:extLst>
-          </p:cNvPr>
-          <p:cNvSpPr>
-            <a:spLocks noGrp="1"/>
-          </p:cNvSpPr>
-          <p:nvPr>
-            <p:ph idx="1"/>
-          </p:nvPr>
-        </p:nvSpPr>
-        <p:spPr/>
-        <p:txBody>
-          <a:bodyPr/>
-          <a:lstStyle/>
-          <a:p>
-            <a:endParaRPr kumimoji="1" lang="ja-JP" altLang="en-US" dirty="0"/>
+          <p:cNvPr id="8" name="テキスト ボックス 7">
+            <a:extLst>
+              <a:ext uri="{FF2B5EF4-FFF2-40B4-BE49-F238E27FC236}">
+                <a16:creationId xmlns:a16="http://schemas.microsoft.com/office/drawing/2014/main" id="{BAEEF3B5-A951-4E13-95F1-D93BDD5EDD3C}"/>
+              </a:ext>
+            </a:extLst>
+          </p:cNvPr>
+          <p:cNvSpPr txBox="1"/>
+          <p:nvPr/>
+        </p:nvSpPr>
+        <p:spPr>
+          <a:xfrm>
+            <a:off x="838200" y="2067002"/>
+            <a:ext cx="8143875" cy="1241815"/>
+          </a:xfrm>
+          <a:prstGeom prst="rect">
+            <a:avLst/>
+          </a:prstGeom>
+          <a:noFill/>
+        </p:spPr>
+        <p:txBody>
+          <a:bodyPr wrap="square" rtlCol="0">
+            <a:spAutoFit/>
+          </a:bodyPr>
+          <a:lstStyle/>
+          <a:p>
+            <a:pPr>
+              <a:lnSpc>
+                <a:spcPct val="200000"/>
+              </a:lnSpc>
+            </a:pPr>
+            <a:r>
+              <a:rPr lang="ja-JP" altLang="en-US" sz="2000" dirty="0"/>
+              <a:t>本システムは、</a:t>
+            </a:r>
+            <a:r>
+              <a:rPr lang="en-US" altLang="ja-JP" sz="2000" dirty="0"/>
+              <a:t>Razor Pages</a:t>
+            </a:r>
+            <a:r>
+              <a:rPr lang="ja-JP" altLang="en-US" sz="2000" dirty="0"/>
+              <a:t>を用いて開発しています。</a:t>
+            </a:r>
+            <a:br>
+              <a:rPr lang="ja-JP" altLang="en-US" sz="2000" dirty="0"/>
+            </a:br>
+            <a:r>
+              <a:rPr lang="ja-JP" altLang="en-US" sz="2000" dirty="0"/>
+              <a:t>画面操作からデータベース更新までの流れを以下に示します。</a:t>
+            </a:r>
+            <a:endParaRPr kumimoji="1" lang="ja-JP" altLang="en-US" sz="2000" dirty="0"/>
           </a:p>
         </p:txBody>
       </p:sp>
@@ -4922,25 +7289,286 @@
       </p:sp>
       <p:sp>
         <p:nvSpPr>
-          <p:cNvPr id="3" name="コンテンツ プレースホルダー 2">
-            <a:extLst>
-              <a:ext uri="{FF2B5EF4-FFF2-40B4-BE49-F238E27FC236}">
-                <a16:creationId xmlns:a16="http://schemas.microsoft.com/office/drawing/2014/main" id="{E89FE1EB-09A4-4B24-AA9B-41856D02A1AB}"/>
-              </a:ext>
-            </a:extLst>
-          </p:cNvPr>
-          <p:cNvSpPr>
-            <a:spLocks noGrp="1"/>
-          </p:cNvSpPr>
-          <p:nvPr>
-            <p:ph idx="1"/>
-          </p:nvPr>
-        </p:nvSpPr>
-        <p:spPr/>
-        <p:txBody>
-          <a:bodyPr/>
-          <a:lstStyle/>
-          <a:p>
+          <p:cNvPr id="4" name="テキスト ボックス 3">
+            <a:extLst>
+              <a:ext uri="{FF2B5EF4-FFF2-40B4-BE49-F238E27FC236}">
+                <a16:creationId xmlns:a16="http://schemas.microsoft.com/office/drawing/2014/main" id="{1EFB46BC-1D25-490F-BD4E-43CCE04958BC}"/>
+              </a:ext>
+            </a:extLst>
+          </p:cNvPr>
+          <p:cNvSpPr txBox="1"/>
+          <p:nvPr/>
+        </p:nvSpPr>
+        <p:spPr>
+          <a:xfrm>
+            <a:off x="1009649" y="1919733"/>
+            <a:ext cx="3390901" cy="1579471"/>
+          </a:xfrm>
+          <a:prstGeom prst="rect">
+            <a:avLst/>
+          </a:prstGeom>
+          <a:noFill/>
+        </p:spPr>
+        <p:txBody>
+          <a:bodyPr wrap="square" rtlCol="0">
+            <a:spAutoFit/>
+          </a:bodyPr>
+          <a:lstStyle/>
+          <a:p>
+            <a:r>
+              <a:rPr kumimoji="1" lang="en-US" altLang="ja-JP" sz="2800" dirty="0"/>
+              <a:t>【</a:t>
+            </a:r>
+            <a:r>
+              <a:rPr kumimoji="1" lang="ja-JP" altLang="en-US" sz="2800" dirty="0"/>
+              <a:t>フロントエンド</a:t>
+            </a:r>
+            <a:r>
+              <a:rPr kumimoji="1" lang="en-US" altLang="ja-JP" sz="2800" dirty="0"/>
+              <a:t>】</a:t>
+            </a:r>
+          </a:p>
+          <a:p>
+            <a:pPr marL="285750" indent="-285750">
+              <a:lnSpc>
+                <a:spcPct val="150000"/>
+              </a:lnSpc>
+              <a:buFont typeface="Arial" panose="020B0604020202020204" pitchFamily="34" charset="0"/>
+              <a:buChar char="•"/>
+            </a:pPr>
+            <a:r>
+              <a:rPr lang="en-US" altLang="ja-JP" sz="2400" dirty="0"/>
+              <a:t>HTML</a:t>
+            </a:r>
+          </a:p>
+          <a:p>
+            <a:pPr marL="285750" indent="-285750">
+              <a:lnSpc>
+                <a:spcPct val="150000"/>
+              </a:lnSpc>
+              <a:buFont typeface="Arial" panose="020B0604020202020204" pitchFamily="34" charset="0"/>
+              <a:buChar char="•"/>
+            </a:pPr>
+            <a:r>
+              <a:rPr kumimoji="1" lang="en-US" altLang="ja-JP" sz="2400" dirty="0"/>
+              <a:t>CSS</a:t>
+            </a:r>
+            <a:endParaRPr kumimoji="1" lang="ja-JP" altLang="en-US" sz="2400" dirty="0"/>
+          </a:p>
+        </p:txBody>
+      </p:sp>
+      <p:sp>
+        <p:nvSpPr>
+          <p:cNvPr id="5" name="テキスト ボックス 4">
+            <a:extLst>
+              <a:ext uri="{FF2B5EF4-FFF2-40B4-BE49-F238E27FC236}">
+                <a16:creationId xmlns:a16="http://schemas.microsoft.com/office/drawing/2014/main" id="{85F898DD-7A39-4230-B61D-7CD2F63FAE76}"/>
+              </a:ext>
+            </a:extLst>
+          </p:cNvPr>
+          <p:cNvSpPr txBox="1"/>
+          <p:nvPr/>
+        </p:nvSpPr>
+        <p:spPr>
+          <a:xfrm>
+            <a:off x="1009648" y="4054196"/>
+            <a:ext cx="3390901" cy="2133469"/>
+          </a:xfrm>
+          <a:prstGeom prst="rect">
+            <a:avLst/>
+          </a:prstGeom>
+          <a:noFill/>
+        </p:spPr>
+        <p:txBody>
+          <a:bodyPr wrap="square" rtlCol="0">
+            <a:spAutoFit/>
+          </a:bodyPr>
+          <a:lstStyle/>
+          <a:p>
+            <a:r>
+              <a:rPr kumimoji="1" lang="en-US" altLang="ja-JP" sz="2800" dirty="0"/>
+              <a:t>【</a:t>
+            </a:r>
+            <a:r>
+              <a:rPr lang="ja-JP" altLang="en-US" sz="2800" dirty="0"/>
+              <a:t>バック</a:t>
+            </a:r>
+            <a:r>
+              <a:rPr kumimoji="1" lang="ja-JP" altLang="en-US" sz="2800" dirty="0"/>
+              <a:t>エンド</a:t>
+            </a:r>
+            <a:r>
+              <a:rPr kumimoji="1" lang="en-US" altLang="ja-JP" sz="2800" dirty="0"/>
+              <a:t>】</a:t>
+            </a:r>
+          </a:p>
+          <a:p>
+            <a:pPr marL="285750" indent="-285750">
+              <a:lnSpc>
+                <a:spcPct val="150000"/>
+              </a:lnSpc>
+              <a:buFont typeface="Arial" panose="020B0604020202020204" pitchFamily="34" charset="0"/>
+              <a:buChar char="•"/>
+            </a:pPr>
+            <a:r>
+              <a:rPr lang="en-US" altLang="ja-JP" sz="2400" dirty="0"/>
+              <a:t>C#</a:t>
+            </a:r>
+          </a:p>
+          <a:p>
+            <a:pPr marL="285750" indent="-285750">
+              <a:lnSpc>
+                <a:spcPct val="150000"/>
+              </a:lnSpc>
+              <a:buFont typeface="Arial" panose="020B0604020202020204" pitchFamily="34" charset="0"/>
+              <a:buChar char="•"/>
+            </a:pPr>
+            <a:r>
+              <a:rPr lang="en-US" altLang="ja-JP" sz="2400" dirty="0"/>
+              <a:t>ASP.NET Core</a:t>
+            </a:r>
+          </a:p>
+          <a:p>
+            <a:pPr marL="285750" indent="-285750">
+              <a:lnSpc>
+                <a:spcPct val="150000"/>
+              </a:lnSpc>
+              <a:buFont typeface="Arial" panose="020B0604020202020204" pitchFamily="34" charset="0"/>
+              <a:buChar char="•"/>
+            </a:pPr>
+            <a:r>
+              <a:rPr lang="en-US" altLang="ja-JP" sz="2400" dirty="0"/>
+              <a:t>Razor Pages</a:t>
+            </a:r>
+            <a:endParaRPr kumimoji="1" lang="ja-JP" altLang="en-US" sz="2400" dirty="0"/>
+          </a:p>
+        </p:txBody>
+      </p:sp>
+      <p:sp>
+        <p:nvSpPr>
+          <p:cNvPr id="6" name="テキスト ボックス 5">
+            <a:extLst>
+              <a:ext uri="{FF2B5EF4-FFF2-40B4-BE49-F238E27FC236}">
+                <a16:creationId xmlns:a16="http://schemas.microsoft.com/office/drawing/2014/main" id="{FA8D5839-89F6-49F6-BB73-913ED8292A3A}"/>
+              </a:ext>
+            </a:extLst>
+          </p:cNvPr>
+          <p:cNvSpPr txBox="1"/>
+          <p:nvPr/>
+        </p:nvSpPr>
+        <p:spPr>
+          <a:xfrm>
+            <a:off x="5624514" y="1919733"/>
+            <a:ext cx="5691188" cy="1815882"/>
+          </a:xfrm>
+          <a:prstGeom prst="rect">
+            <a:avLst/>
+          </a:prstGeom>
+          <a:noFill/>
+        </p:spPr>
+        <p:txBody>
+          <a:bodyPr wrap="square" rtlCol="0">
+            <a:spAutoFit/>
+          </a:bodyPr>
+          <a:lstStyle/>
+          <a:p>
+            <a:r>
+              <a:rPr kumimoji="1" lang="en-US" altLang="ja-JP" sz="2800" dirty="0"/>
+              <a:t>【</a:t>
+            </a:r>
+            <a:r>
+              <a:rPr lang="en-US" altLang="ja-JP" sz="2800" dirty="0"/>
+              <a:t>DB</a:t>
+            </a:r>
+            <a:r>
+              <a:rPr kumimoji="1" lang="en-US" altLang="ja-JP" sz="2800" dirty="0"/>
+              <a:t>】</a:t>
+            </a:r>
+          </a:p>
+          <a:p>
+            <a:pPr marL="285750" indent="-285750">
+              <a:lnSpc>
+                <a:spcPct val="150000"/>
+              </a:lnSpc>
+              <a:buFont typeface="Arial" panose="020B0604020202020204" pitchFamily="34" charset="0"/>
+              <a:buChar char="•"/>
+            </a:pPr>
+            <a:r>
+              <a:rPr lang="en-US" altLang="ja-JP" sz="2400" dirty="0"/>
+              <a:t>SQL Server</a:t>
+            </a:r>
+          </a:p>
+          <a:p>
+            <a:pPr marL="285750" indent="-285750">
+              <a:buFont typeface="Arial" panose="020B0604020202020204" pitchFamily="34" charset="0"/>
+              <a:buChar char="•"/>
+            </a:pPr>
+            <a:r>
+              <a:rPr lang="en-US" altLang="ja-JP" sz="2400" dirty="0"/>
+              <a:t>SQL Server Management Studio (SSMS)</a:t>
+            </a:r>
+          </a:p>
+        </p:txBody>
+      </p:sp>
+      <p:sp>
+        <p:nvSpPr>
+          <p:cNvPr id="7" name="テキスト ボックス 6">
+            <a:extLst>
+              <a:ext uri="{FF2B5EF4-FFF2-40B4-BE49-F238E27FC236}">
+                <a16:creationId xmlns:a16="http://schemas.microsoft.com/office/drawing/2014/main" id="{46BA38DC-E7D1-4F76-9BD0-787B30407E1A}"/>
+              </a:ext>
+            </a:extLst>
+          </p:cNvPr>
+          <p:cNvSpPr txBox="1"/>
+          <p:nvPr/>
+        </p:nvSpPr>
+        <p:spPr>
+          <a:xfrm>
+            <a:off x="5624514" y="4054196"/>
+            <a:ext cx="3919538" cy="1354217"/>
+          </a:xfrm>
+          <a:prstGeom prst="rect">
+            <a:avLst/>
+          </a:prstGeom>
+          <a:noFill/>
+        </p:spPr>
+        <p:txBody>
+          <a:bodyPr wrap="square" rtlCol="0">
+            <a:spAutoFit/>
+          </a:bodyPr>
+          <a:lstStyle/>
+          <a:p>
+            <a:r>
+              <a:rPr kumimoji="1" lang="en-US" altLang="ja-JP" sz="2800" dirty="0"/>
+              <a:t>【</a:t>
+            </a:r>
+            <a:r>
+              <a:rPr lang="ja-JP" altLang="en-US" sz="2800" dirty="0"/>
+              <a:t>開発環境</a:t>
+            </a:r>
+            <a:r>
+              <a:rPr kumimoji="1" lang="en-US" altLang="ja-JP" sz="2800" dirty="0"/>
+              <a:t>】</a:t>
+            </a:r>
+          </a:p>
+          <a:p>
+            <a:pPr marL="285750" indent="-285750">
+              <a:lnSpc>
+                <a:spcPct val="150000"/>
+              </a:lnSpc>
+              <a:buFont typeface="Arial" panose="020B0604020202020204" pitchFamily="34" charset="0"/>
+              <a:buChar char="•"/>
+            </a:pPr>
+            <a:r>
+              <a:rPr lang="en-US" altLang="ja-JP" sz="2400" dirty="0"/>
+              <a:t>Visual Studio 2026</a:t>
+            </a:r>
+          </a:p>
+          <a:p>
+            <a:pPr marL="285750" indent="-285750">
+              <a:buFont typeface="Arial" panose="020B0604020202020204" pitchFamily="34" charset="0"/>
+              <a:buChar char="•"/>
+            </a:pPr>
             <a:endParaRPr kumimoji="1" lang="ja-JP" altLang="en-US" dirty="0"/>
           </a:p>
         </p:txBody>
@@ -5024,50 +7652,137 @@
             <p:ph idx="1"/>
           </p:nvPr>
         </p:nvSpPr>
-        <p:spPr/>
-        <p:txBody>
-          <a:bodyPr/>
-          <a:lstStyle/>
-          <a:p>
-            <a:endParaRPr kumimoji="1" lang="ja-JP" altLang="en-US" dirty="0"/>
-          </a:p>
-        </p:txBody>
-      </p:sp>
-      <p:sp>
-        <p:nvSpPr>
-          <p:cNvPr id="5" name="テキスト ボックス 4">
-            <a:extLst>
-              <a:ext uri="{FF2B5EF4-FFF2-40B4-BE49-F238E27FC236}">
-                <a16:creationId xmlns:a16="http://schemas.microsoft.com/office/drawing/2014/main" id="{37E43428-E797-440F-9E53-591E2E7E52A8}"/>
-              </a:ext>
-            </a:extLst>
-          </p:cNvPr>
-          <p:cNvSpPr txBox="1"/>
-          <p:nvPr/>
-        </p:nvSpPr>
         <p:spPr>
           <a:xfrm>
-            <a:off x="3046810" y="3244334"/>
-            <a:ext cx="6093618" cy="369332"/>
+            <a:off x="1738313" y="1839912"/>
+            <a:ext cx="3019425" cy="4351338"/>
+          </a:xfrm>
+        </p:spPr>
+        <p:txBody>
+          <a:bodyPr>
+            <a:normAutofit/>
+          </a:bodyPr>
+          <a:lstStyle/>
+          <a:p>
+            <a:pPr marL="0" indent="0">
+              <a:buNone/>
+            </a:pPr>
+            <a:r>
+              <a:rPr lang="en-US" altLang="ja-JP" sz="3600" dirty="0"/>
+              <a:t>【</a:t>
+            </a:r>
+            <a:r>
+              <a:rPr lang="ja-JP" altLang="en-US" sz="3600" dirty="0"/>
+              <a:t>実演内容</a:t>
+            </a:r>
+            <a:r>
+              <a:rPr lang="en-US" altLang="ja-JP" sz="3600" dirty="0"/>
+              <a:t>】</a:t>
+            </a:r>
+          </a:p>
+          <a:p>
+            <a:pPr>
+              <a:lnSpc>
+                <a:spcPct val="150000"/>
+              </a:lnSpc>
+            </a:pPr>
+            <a:r>
+              <a:rPr lang="ja-JP" altLang="en-US" sz="2400" dirty="0"/>
+              <a:t>ログイン</a:t>
+            </a:r>
+            <a:endParaRPr lang="en-US" altLang="ja-JP" sz="2400" dirty="0"/>
+          </a:p>
+          <a:p>
+            <a:pPr>
+              <a:lnSpc>
+                <a:spcPct val="150000"/>
+              </a:lnSpc>
+            </a:pPr>
+            <a:r>
+              <a:rPr lang="zh-TW" altLang="en-US" sz="2400" dirty="0"/>
+              <a:t>蔵書詳細表示</a:t>
+            </a:r>
+            <a:endParaRPr lang="en-US" altLang="zh-TW" sz="2400" dirty="0"/>
+          </a:p>
+          <a:p>
+            <a:pPr>
+              <a:lnSpc>
+                <a:spcPct val="150000"/>
+              </a:lnSpc>
+            </a:pPr>
+            <a:r>
+              <a:rPr lang="ja-JP" altLang="en-US" sz="2400" dirty="0"/>
+              <a:t>貸出処理</a:t>
+            </a:r>
+          </a:p>
+          <a:p>
+            <a:pPr>
+              <a:lnSpc>
+                <a:spcPct val="150000"/>
+              </a:lnSpc>
+            </a:pPr>
+            <a:r>
+              <a:rPr lang="ja-JP" altLang="en-US" sz="2400" dirty="0"/>
+              <a:t>返却処理</a:t>
+            </a:r>
+            <a:endParaRPr lang="en-US" altLang="ja-JP" sz="2400" dirty="0"/>
+          </a:p>
+          <a:p>
+            <a:pPr>
+              <a:lnSpc>
+                <a:spcPct val="150000"/>
+              </a:lnSpc>
+            </a:pPr>
+            <a:r>
+              <a:rPr lang="zh-TW" altLang="en-US" sz="2400" dirty="0"/>
+              <a:t>貸出履歴表示</a:t>
+            </a:r>
+            <a:endParaRPr lang="en-US" altLang="ja-JP" sz="2400" dirty="0"/>
+          </a:p>
+          <a:p>
+            <a:endParaRPr lang="en-US" altLang="ja-JP" sz="3600" dirty="0"/>
+          </a:p>
+          <a:p>
+            <a:endParaRPr kumimoji="1" lang="ja-JP" altLang="en-US" sz="3600" dirty="0"/>
+          </a:p>
+        </p:txBody>
+      </p:sp>
+      <p:pic>
+        <p:nvPicPr>
+          <p:cNvPr id="6" name="図 5">
+            <a:extLst>
+              <a:ext uri="{FF2B5EF4-FFF2-40B4-BE49-F238E27FC236}">
+                <a16:creationId xmlns:a16="http://schemas.microsoft.com/office/drawing/2014/main" id="{BC272E2A-24C4-48E3-BB5D-E89F5ADA3DCD}"/>
+              </a:ext>
+            </a:extLst>
+          </p:cNvPr>
+          <p:cNvPicPr>
+            <a:picLocks noChangeAspect="1"/>
+          </p:cNvPicPr>
+          <p:nvPr/>
+        </p:nvPicPr>
+        <p:blipFill>
+          <a:blip r:embed="rId3">
+            <a:extLst>
+              <a:ext uri="{28A0092B-C50C-407E-A947-70E740481C1C}">
+                <a14:useLocalDpi xmlns:a14="http://schemas.microsoft.com/office/drawing/2010/main" val="0"/>
+              </a:ext>
+            </a:extLst>
+          </a:blip>
+          <a:stretch>
+            <a:fillRect/>
+          </a:stretch>
+        </p:blipFill>
+        <p:spPr>
+          <a:xfrm>
+            <a:off x="5564723" y="1530404"/>
+            <a:ext cx="4565394" cy="4970353"/>
           </a:xfrm>
           <a:prstGeom prst="rect">
             <a:avLst/>
           </a:prstGeom>
-          <a:noFill/>
         </p:spPr>
-        <p:txBody>
-          <a:bodyPr wrap="square">
-            <a:spAutoFit/>
-          </a:bodyPr>
-          <a:lstStyle/>
-          <a:p>
-            <a:r>
-              <a:rPr lang="ja-JP" altLang="en-US" dirty="0"/>
-              <a:t>使用技術</a:t>
-            </a:r>
-          </a:p>
-        </p:txBody>
-      </p:sp>
+      </p:pic>
     </p:spTree>
     <p:extLst>
       <p:ext uri="{BB962C8B-B14F-4D97-AF65-F5344CB8AC3E}">
@@ -5120,7 +7835,7 @@
           <a:lstStyle/>
           <a:p>
             <a:r>
-              <a:rPr lang="ja-JP" altLang="en-US">
+              <a:rPr lang="ja-JP" altLang="en-US" dirty="0">
                 <a:latin typeface="+mj-ea"/>
               </a:rPr>
               <a:t>総合演習の所感</a:t>
@@ -5147,47 +7862,130 @@
             <p:ph idx="1"/>
           </p:nvPr>
         </p:nvSpPr>
-        <p:spPr/>
-        <p:txBody>
-          <a:bodyPr/>
-          <a:lstStyle/>
-          <a:p>
-            <a:endParaRPr kumimoji="1" lang="ja-JP" altLang="en-US" dirty="0"/>
-          </a:p>
-        </p:txBody>
-      </p:sp>
-      <p:sp>
-        <p:nvSpPr>
-          <p:cNvPr id="5" name="テキスト ボックス 4">
-            <a:extLst>
-              <a:ext uri="{FF2B5EF4-FFF2-40B4-BE49-F238E27FC236}">
-                <a16:creationId xmlns:a16="http://schemas.microsoft.com/office/drawing/2014/main" id="{37E43428-E797-440F-9E53-591E2E7E52A8}"/>
-              </a:ext>
-            </a:extLst>
-          </p:cNvPr>
-          <p:cNvSpPr txBox="1"/>
-          <p:nvPr/>
-        </p:nvSpPr>
         <p:spPr>
           <a:xfrm>
-            <a:off x="3046810" y="3244334"/>
-            <a:ext cx="6093618" cy="369332"/>
+            <a:off x="838200" y="1879414"/>
+            <a:ext cx="10515600" cy="4351338"/>
           </a:xfrm>
-          <a:prstGeom prst="rect">
-            <a:avLst/>
-          </a:prstGeom>
-          <a:noFill/>
         </p:spPr>
         <p:txBody>
-          <a:bodyPr wrap="square">
-            <a:spAutoFit/>
-          </a:bodyPr>
-          <a:lstStyle/>
-          <a:p>
+          <a:bodyPr/>
+          <a:lstStyle/>
+          <a:p>
+            <a:pPr marL="0" indent="0">
+              <a:buNone/>
+            </a:pPr>
+            <a:r>
+              <a:rPr lang="en-US" altLang="ja-JP" dirty="0"/>
+              <a:t>【</a:t>
+            </a:r>
             <a:r>
               <a:rPr lang="ja-JP" altLang="en-US" dirty="0"/>
-              <a:t>使用技術</a:t>
-            </a:r>
+              <a:t>学んだこと</a:t>
+            </a:r>
+            <a:r>
+              <a:rPr lang="en-US" altLang="ja-JP" dirty="0"/>
+              <a:t>】</a:t>
+            </a:r>
+          </a:p>
+          <a:p>
+            <a:pPr>
+              <a:lnSpc>
+                <a:spcPct val="150000"/>
+              </a:lnSpc>
+            </a:pPr>
+            <a:r>
+              <a:rPr lang="en-US" altLang="ja-JP" sz="2400" dirty="0"/>
+              <a:t>Razor Pages</a:t>
+            </a:r>
+            <a:r>
+              <a:rPr lang="ja-JP" altLang="en-US" sz="2400" dirty="0"/>
+              <a:t>による</a:t>
+            </a:r>
+            <a:r>
+              <a:rPr lang="en-US" altLang="ja-JP" sz="2400" dirty="0"/>
+              <a:t>Web</a:t>
+            </a:r>
+            <a:r>
+              <a:rPr lang="ja-JP" altLang="en-US" sz="2400" dirty="0"/>
+              <a:t>アプリ開発</a:t>
+            </a:r>
+            <a:endParaRPr lang="en-US" altLang="ja-JP" sz="2400" dirty="0"/>
+          </a:p>
+          <a:p>
+            <a:pPr>
+              <a:lnSpc>
+                <a:spcPct val="150000"/>
+              </a:lnSpc>
+            </a:pPr>
+            <a:r>
+              <a:rPr lang="en-US" altLang="ja-JP" sz="2400" dirty="0"/>
+              <a:t>SQL Server</a:t>
+            </a:r>
+            <a:r>
+              <a:rPr lang="ja-JP" altLang="en-US" sz="2400" dirty="0"/>
+              <a:t>とのデータ連携</a:t>
+            </a:r>
+            <a:endParaRPr lang="en-US" altLang="ja-JP" sz="2400" dirty="0"/>
+          </a:p>
+          <a:p>
+            <a:pPr marL="0" indent="0">
+              <a:buNone/>
+            </a:pPr>
+            <a:endParaRPr lang="en-US" altLang="ja-JP" dirty="0"/>
+          </a:p>
+          <a:p>
+            <a:pPr marL="0" indent="0">
+              <a:buNone/>
+            </a:pPr>
+            <a:r>
+              <a:rPr lang="en-US" altLang="ja-JP" dirty="0"/>
+              <a:t>【</a:t>
+            </a:r>
+            <a:r>
+              <a:rPr lang="ja-JP" altLang="en-US" dirty="0"/>
+              <a:t>苦労したこと</a:t>
+            </a:r>
+            <a:r>
+              <a:rPr lang="en-US" altLang="ja-JP" dirty="0"/>
+              <a:t>】</a:t>
+            </a:r>
+          </a:p>
+          <a:p>
+            <a:pPr>
+              <a:lnSpc>
+                <a:spcPct val="150000"/>
+              </a:lnSpc>
+            </a:pPr>
+            <a:r>
+              <a:rPr lang="ja-JP" altLang="en-US" sz="2400" dirty="0"/>
+              <a:t>画面と</a:t>
+            </a:r>
+            <a:r>
+              <a:rPr lang="en-US" altLang="ja-JP" sz="2400" dirty="0"/>
+              <a:t>DB</a:t>
+            </a:r>
+            <a:r>
+              <a:rPr lang="ja-JP" altLang="en-US" sz="2400" dirty="0"/>
+              <a:t>の連携</a:t>
+            </a:r>
+            <a:endParaRPr lang="en-US" altLang="ja-JP" sz="2400" dirty="0"/>
+          </a:p>
+          <a:p>
+            <a:pPr>
+              <a:lnSpc>
+                <a:spcPct val="150000"/>
+              </a:lnSpc>
+            </a:pPr>
+            <a:r>
+              <a:rPr lang="en-US" altLang="ja-JP" sz="2400" dirty="0"/>
+              <a:t>GET/POST</a:t>
+            </a:r>
+            <a:r>
+              <a:rPr lang="ja-JP" altLang="en-US" sz="2400" dirty="0"/>
+              <a:t>の処理の流れの理解</a:t>
+            </a:r>
+            <a:endParaRPr kumimoji="1" lang="ja-JP" altLang="en-US" sz="2400" dirty="0"/>
           </a:p>
         </p:txBody>
       </p:sp>
@@ -5209,13 +8007,7 @@
   <p:cSld>
     <p:spTree>
       <p:nvGrpSpPr>
-        <p:cNvPr id="1" name="">
-          <a:extLst>
-            <a:ext uri="{FF2B5EF4-FFF2-40B4-BE49-F238E27FC236}">
-              <a16:creationId xmlns:a16="http://schemas.microsoft.com/office/drawing/2014/main" id="{76224109-D405-A987-6572-E338023A6777}"/>
-            </a:ext>
-          </a:extLst>
-        </p:cNvPr>
+        <p:cNvPr id="1" name=""/>
         <p:cNvGrpSpPr/>
         <p:nvPr/>
       </p:nvGrpSpPr>
@@ -5232,7 +8024,7 @@
           <p:cNvPr id="2" name="タイトル 1">
             <a:extLst>
               <a:ext uri="{FF2B5EF4-FFF2-40B4-BE49-F238E27FC236}">
-                <a16:creationId xmlns:a16="http://schemas.microsoft.com/office/drawing/2014/main" id="{01D1FE57-6B51-CFE3-1AD4-B96A42E177DE}"/>
+                <a16:creationId xmlns:a16="http://schemas.microsoft.com/office/drawing/2014/main" id="{0C569D8B-F13B-4EEB-848C-07D8B6399149}"/>
               </a:ext>
             </a:extLst>
           </p:cNvPr>
@@ -5249,117 +8041,110 @@
           <a:lstStyle/>
           <a:p>
             <a:r>
+              <a:rPr lang="ja-JP" altLang="en-US" dirty="0">
+                <a:latin typeface="+mj-ea"/>
+              </a:rPr>
+              <a:t>研修全体の所感</a:t>
+            </a:r>
+            <a:endParaRPr kumimoji="1" lang="ja-JP" altLang="en-US" dirty="0">
+              <a:latin typeface="+mj-ea"/>
+            </a:endParaRPr>
+          </a:p>
+        </p:txBody>
+      </p:sp>
+      <p:sp>
+        <p:nvSpPr>
+          <p:cNvPr id="3" name="コンテンツ プレースホルダー 2">
+            <a:extLst>
+              <a:ext uri="{FF2B5EF4-FFF2-40B4-BE49-F238E27FC236}">
+                <a16:creationId xmlns:a16="http://schemas.microsoft.com/office/drawing/2014/main" id="{E89FE1EB-09A4-4B24-AA9B-41856D02A1AB}"/>
+              </a:ext>
+            </a:extLst>
+          </p:cNvPr>
+          <p:cNvSpPr>
+            <a:spLocks noGrp="1"/>
+          </p:cNvSpPr>
+          <p:nvPr>
+            <p:ph idx="1"/>
+          </p:nvPr>
+        </p:nvSpPr>
+        <p:spPr>
+          <a:xfrm>
+            <a:off x="838200" y="1825625"/>
+            <a:ext cx="9363635" cy="4351338"/>
+          </a:xfrm>
+        </p:spPr>
+        <p:txBody>
+          <a:bodyPr/>
+          <a:lstStyle/>
+          <a:p>
+            <a:pPr marL="514350" indent="-514350">
+              <a:lnSpc>
+                <a:spcPct val="200000"/>
+              </a:lnSpc>
+              <a:buFont typeface="+mj-lt"/>
+              <a:buAutoNum type="arabicPeriod"/>
+            </a:pPr>
+            <a:r>
+              <a:rPr kumimoji="1" lang="en-US" altLang="ja-JP" dirty="0"/>
+              <a:t>C#</a:t>
+            </a:r>
+            <a:r>
               <a:rPr kumimoji="1" lang="ja-JP" altLang="en-US" dirty="0"/>
-              <a:t>この資料の書き方について</a:t>
-            </a:r>
-          </a:p>
-        </p:txBody>
-      </p:sp>
-      <p:sp>
-        <p:nvSpPr>
-          <p:cNvPr id="3" name="コンテンツ プレースホルダー 2">
-            <a:extLst>
-              <a:ext uri="{FF2B5EF4-FFF2-40B4-BE49-F238E27FC236}">
-                <a16:creationId xmlns:a16="http://schemas.microsoft.com/office/drawing/2014/main" id="{095783B3-08BC-E6B5-5195-E4D11FE792AD}"/>
-              </a:ext>
-            </a:extLst>
-          </p:cNvPr>
-          <p:cNvSpPr>
-            <a:spLocks noGrp="1"/>
-          </p:cNvSpPr>
-          <p:nvPr>
-            <p:ph idx="1"/>
-          </p:nvPr>
-        </p:nvSpPr>
-        <p:spPr/>
-        <p:txBody>
-          <a:bodyPr>
-            <a:normAutofit lnSpcReduction="10000"/>
-          </a:bodyPr>
-          <a:lstStyle/>
-          <a:p>
+              <a:t>の基礎知識の習得</a:t>
+            </a:r>
+            <a:endParaRPr kumimoji="1" lang="en-US" altLang="ja-JP" dirty="0"/>
+          </a:p>
+          <a:p>
+            <a:pPr marL="514350" indent="-514350">
+              <a:lnSpc>
+                <a:spcPct val="200000"/>
+              </a:lnSpc>
+              <a:buFont typeface="+mj-lt"/>
+              <a:buAutoNum type="arabicPeriod"/>
+            </a:pPr>
+            <a:r>
+              <a:rPr kumimoji="1" lang="ja-JP" altLang="en-US" dirty="0"/>
+              <a:t>オブジェクト指向の理解</a:t>
+            </a:r>
+          </a:p>
+          <a:p>
+            <a:pPr marL="514350" indent="-514350">
+              <a:lnSpc>
+                <a:spcPct val="200000"/>
+              </a:lnSpc>
+              <a:buFont typeface="+mj-lt"/>
+              <a:buAutoNum type="arabicPeriod"/>
+            </a:pPr>
+            <a:r>
+              <a:rPr kumimoji="1" lang="ja-JP" altLang="en-US" dirty="0"/>
+              <a:t>データベース連携の習得</a:t>
+            </a:r>
+            <a:endParaRPr lang="en-US" altLang="ja-JP" dirty="0"/>
+          </a:p>
+          <a:p>
+            <a:pPr marL="514350" indent="-514350">
+              <a:lnSpc>
+                <a:spcPct val="200000"/>
+              </a:lnSpc>
+              <a:buFont typeface="+mj-lt"/>
+              <a:buAutoNum type="arabicPeriod"/>
+            </a:pPr>
             <a:r>
               <a:rPr kumimoji="1" lang="en-US" altLang="ja-JP" dirty="0"/>
-              <a:t>PowerPoint</a:t>
+              <a:t>Web</a:t>
             </a:r>
             <a:r>
               <a:rPr kumimoji="1" lang="ja-JP" altLang="en-US" dirty="0"/>
-              <a:t>上に書くことはなるべく簡潔に</a:t>
-            </a:r>
-            <a:r>
-              <a:rPr lang="ja-JP" altLang="en-US" dirty="0"/>
-              <a:t>、具体例など長くなる部分は口頭で補足する</a:t>
-            </a:r>
-            <a:endParaRPr lang="en-US" altLang="ja-JP" dirty="0"/>
-          </a:p>
-          <a:p>
-            <a:r>
-              <a:rPr lang="ja-JP" altLang="en-US" dirty="0"/>
-              <a:t>技術的な話と自分の振る舞いの話（時間の使い方、作業効率、報連相など）を両方書くと良い</a:t>
-            </a:r>
-            <a:endParaRPr lang="en-US" altLang="ja-JP" dirty="0"/>
-          </a:p>
-          <a:p>
-            <a:r>
-              <a:rPr lang="ja-JP" altLang="en-US" dirty="0"/>
-              <a:t>相手への伝わり方を考えて記述する</a:t>
-            </a:r>
-            <a:endParaRPr lang="en-US" altLang="ja-JP" dirty="0"/>
-          </a:p>
-          <a:p>
-            <a:pPr lvl="1"/>
-            <a:r>
-              <a:rPr lang="ja-JP" altLang="en-US" dirty="0"/>
-              <a:t>毎回同じことを書く部分はコピペを多用した（人によっては適当に貼り付けた印象を持つ）</a:t>
-            </a:r>
-            <a:endParaRPr lang="en-US" altLang="ja-JP" dirty="0"/>
-          </a:p>
-          <a:p>
-            <a:pPr lvl="1"/>
-            <a:r>
-              <a:rPr lang="ja-JP" altLang="en-US" dirty="0"/>
-              <a:t>共通部分は再利用できる形に整理し効率化を図った　など</a:t>
-            </a:r>
-            <a:endParaRPr lang="en-US" altLang="ja-JP" dirty="0"/>
-          </a:p>
-          <a:p>
-            <a:pPr lvl="1"/>
-            <a:r>
-              <a:rPr lang="ja-JP" altLang="en-US" dirty="0"/>
-              <a:t>言い回しについては</a:t>
-            </a:r>
-            <a:r>
-              <a:rPr lang="en-US" altLang="ja-JP" dirty="0"/>
-              <a:t>AI</a:t>
-            </a:r>
-            <a:r>
-              <a:rPr lang="ja-JP" altLang="en-US" dirty="0"/>
-              <a:t>に聞いてみても</a:t>
-            </a:r>
-            <a:r>
-              <a:rPr lang="en-US" altLang="ja-JP" dirty="0"/>
-              <a:t>OK</a:t>
-            </a:r>
-          </a:p>
-          <a:p>
-            <a:r>
-              <a:rPr lang="ja-JP" altLang="en-US" dirty="0"/>
-              <a:t>必ずこのテンプレ通りに書かなくてはいけないわけではない。各スライドを細分化しスライド数を増やしても</a:t>
-            </a:r>
-            <a:r>
-              <a:rPr lang="en-US" altLang="ja-JP" dirty="0"/>
-              <a:t>OK</a:t>
-            </a:r>
-          </a:p>
-          <a:p>
-            <a:endParaRPr kumimoji="1" lang="en-US" altLang="ja-JP" dirty="0"/>
+              <a:t>アプリケーション開発の経験</a:t>
+            </a:r>
           </a:p>
         </p:txBody>
       </p:sp>
     </p:spTree>
     <p:extLst>
       <p:ext uri="{BB962C8B-B14F-4D97-AF65-F5344CB8AC3E}">
-        <p14:creationId xmlns:p14="http://schemas.microsoft.com/office/powerpoint/2010/main" val="1354997447"/>
+        <p14:creationId xmlns:p14="http://schemas.microsoft.com/office/powerpoint/2010/main" val="342906961"/>
       </p:ext>
     </p:extLst>
   </p:cSld>
